--- a/1С_Предприятие/лекции/3 лекция.pptx
+++ b/1С_Предприятие/лекции/3 лекция.pptx
@@ -6,10 +6,19 @@
   </p:sldMasterIdLst>
   <p:sldIdLst>
     <p:sldId id="256" r:id="rId2"/>
-    <p:sldId id="257" r:id="rId3"/>
-    <p:sldId id="258" r:id="rId4"/>
-    <p:sldId id="260" r:id="rId5"/>
-    <p:sldId id="261" r:id="rId6"/>
+    <p:sldId id="263" r:id="rId3"/>
+    <p:sldId id="257" r:id="rId4"/>
+    <p:sldId id="258" r:id="rId5"/>
+    <p:sldId id="260" r:id="rId6"/>
+    <p:sldId id="261" r:id="rId7"/>
+    <p:sldId id="262" r:id="rId8"/>
+    <p:sldId id="264" r:id="rId9"/>
+    <p:sldId id="265" r:id="rId10"/>
+    <p:sldId id="266" r:id="rId11"/>
+    <p:sldId id="267" r:id="rId12"/>
+    <p:sldId id="268" r:id="rId13"/>
+    <p:sldId id="269" r:id="rId14"/>
+    <p:sldId id="270" r:id="rId15"/>
   </p:sldIdLst>
   <p:sldSz cx="9144000" cy="6858000" type="screen4x3"/>
   <p:notesSz cx="6858000" cy="9144000"/>
@@ -292,7 +301,8 @@
           <a:p>
             <a:fld id="{8E5164BE-D66A-4271-84DB-1DFB15F9F296}" type="datetimeFigureOut">
               <a:rPr lang="ru-RU" smtClean="0"/>
-              <a:t>22.03.2026</a:t>
+              <a:pPr/>
+              <a:t>23.03.2026</a:t>
             </a:fld>
             <a:endParaRPr lang="ru-RU"/>
           </a:p>
@@ -334,6 +344,7 @@
           <a:p>
             <a:fld id="{1C2EDCFD-5AFD-456C-A5F9-E4C1C95E2D1F}" type="slidenum">
               <a:rPr lang="ru-RU" smtClean="0"/>
+              <a:pPr/>
               <a:t>‹#›</a:t>
             </a:fld>
             <a:endParaRPr lang="ru-RU"/>
@@ -457,7 +468,8 @@
           <a:p>
             <a:fld id="{8E5164BE-D66A-4271-84DB-1DFB15F9F296}" type="datetimeFigureOut">
               <a:rPr lang="ru-RU" smtClean="0"/>
-              <a:t>22.03.2026</a:t>
+              <a:pPr/>
+              <a:t>23.03.2026</a:t>
             </a:fld>
             <a:endParaRPr lang="ru-RU"/>
           </a:p>
@@ -499,6 +511,7 @@
           <a:p>
             <a:fld id="{1C2EDCFD-5AFD-456C-A5F9-E4C1C95E2D1F}" type="slidenum">
               <a:rPr lang="ru-RU" smtClean="0"/>
+              <a:pPr/>
               <a:t>‹#›</a:t>
             </a:fld>
             <a:endParaRPr lang="ru-RU"/>
@@ -632,7 +645,8 @@
           <a:p>
             <a:fld id="{8E5164BE-D66A-4271-84DB-1DFB15F9F296}" type="datetimeFigureOut">
               <a:rPr lang="ru-RU" smtClean="0"/>
-              <a:t>22.03.2026</a:t>
+              <a:pPr/>
+              <a:t>23.03.2026</a:t>
             </a:fld>
             <a:endParaRPr lang="ru-RU"/>
           </a:p>
@@ -674,6 +688,7 @@
           <a:p>
             <a:fld id="{1C2EDCFD-5AFD-456C-A5F9-E4C1C95E2D1F}" type="slidenum">
               <a:rPr lang="ru-RU" smtClean="0"/>
+              <a:pPr/>
               <a:t>‹#›</a:t>
             </a:fld>
             <a:endParaRPr lang="ru-RU"/>
@@ -797,7 +812,8 @@
           <a:p>
             <a:fld id="{8E5164BE-D66A-4271-84DB-1DFB15F9F296}" type="datetimeFigureOut">
               <a:rPr lang="ru-RU" smtClean="0"/>
-              <a:t>22.03.2026</a:t>
+              <a:pPr/>
+              <a:t>23.03.2026</a:t>
             </a:fld>
             <a:endParaRPr lang="ru-RU"/>
           </a:p>
@@ -839,6 +855,7 @@
           <a:p>
             <a:fld id="{1C2EDCFD-5AFD-456C-A5F9-E4C1C95E2D1F}" type="slidenum">
               <a:rPr lang="ru-RU" smtClean="0"/>
+              <a:pPr/>
               <a:t>‹#›</a:t>
             </a:fld>
             <a:endParaRPr lang="ru-RU"/>
@@ -1038,7 +1055,8 @@
           <a:p>
             <a:fld id="{8E5164BE-D66A-4271-84DB-1DFB15F9F296}" type="datetimeFigureOut">
               <a:rPr lang="ru-RU" smtClean="0"/>
-              <a:t>22.03.2026</a:t>
+              <a:pPr/>
+              <a:t>23.03.2026</a:t>
             </a:fld>
             <a:endParaRPr lang="ru-RU"/>
           </a:p>
@@ -1080,6 +1098,7 @@
           <a:p>
             <a:fld id="{1C2EDCFD-5AFD-456C-A5F9-E4C1C95E2D1F}" type="slidenum">
               <a:rPr lang="ru-RU" smtClean="0"/>
+              <a:pPr/>
               <a:t>‹#›</a:t>
             </a:fld>
             <a:endParaRPr lang="ru-RU"/>
@@ -1321,7 +1340,8 @@
           <a:p>
             <a:fld id="{8E5164BE-D66A-4271-84DB-1DFB15F9F296}" type="datetimeFigureOut">
               <a:rPr lang="ru-RU" smtClean="0"/>
-              <a:t>22.03.2026</a:t>
+              <a:pPr/>
+              <a:t>23.03.2026</a:t>
             </a:fld>
             <a:endParaRPr lang="ru-RU"/>
           </a:p>
@@ -1363,6 +1383,7 @@
           <a:p>
             <a:fld id="{1C2EDCFD-5AFD-456C-A5F9-E4C1C95E2D1F}" type="slidenum">
               <a:rPr lang="ru-RU" smtClean="0"/>
+              <a:pPr/>
               <a:t>‹#›</a:t>
             </a:fld>
             <a:endParaRPr lang="ru-RU"/>
@@ -1738,7 +1759,8 @@
           <a:p>
             <a:fld id="{8E5164BE-D66A-4271-84DB-1DFB15F9F296}" type="datetimeFigureOut">
               <a:rPr lang="ru-RU" smtClean="0"/>
-              <a:t>22.03.2026</a:t>
+              <a:pPr/>
+              <a:t>23.03.2026</a:t>
             </a:fld>
             <a:endParaRPr lang="ru-RU"/>
           </a:p>
@@ -1780,6 +1802,7 @@
           <a:p>
             <a:fld id="{1C2EDCFD-5AFD-456C-A5F9-E4C1C95E2D1F}" type="slidenum">
               <a:rPr lang="ru-RU" smtClean="0"/>
+              <a:pPr/>
               <a:t>‹#›</a:t>
             </a:fld>
             <a:endParaRPr lang="ru-RU"/>
@@ -1851,7 +1874,8 @@
           <a:p>
             <a:fld id="{8E5164BE-D66A-4271-84DB-1DFB15F9F296}" type="datetimeFigureOut">
               <a:rPr lang="ru-RU" smtClean="0"/>
-              <a:t>22.03.2026</a:t>
+              <a:pPr/>
+              <a:t>23.03.2026</a:t>
             </a:fld>
             <a:endParaRPr lang="ru-RU"/>
           </a:p>
@@ -1893,6 +1917,7 @@
           <a:p>
             <a:fld id="{1C2EDCFD-5AFD-456C-A5F9-E4C1C95E2D1F}" type="slidenum">
               <a:rPr lang="ru-RU" smtClean="0"/>
+              <a:pPr/>
               <a:t>‹#›</a:t>
             </a:fld>
             <a:endParaRPr lang="ru-RU"/>
@@ -1941,7 +1966,8 @@
           <a:p>
             <a:fld id="{8E5164BE-D66A-4271-84DB-1DFB15F9F296}" type="datetimeFigureOut">
               <a:rPr lang="ru-RU" smtClean="0"/>
-              <a:t>22.03.2026</a:t>
+              <a:pPr/>
+              <a:t>23.03.2026</a:t>
             </a:fld>
             <a:endParaRPr lang="ru-RU"/>
           </a:p>
@@ -1983,6 +2009,7 @@
           <a:p>
             <a:fld id="{1C2EDCFD-5AFD-456C-A5F9-E4C1C95E2D1F}" type="slidenum">
               <a:rPr lang="ru-RU" smtClean="0"/>
+              <a:pPr/>
               <a:t>‹#›</a:t>
             </a:fld>
             <a:endParaRPr lang="ru-RU"/>
@@ -2213,7 +2240,8 @@
           <a:p>
             <a:fld id="{8E5164BE-D66A-4271-84DB-1DFB15F9F296}" type="datetimeFigureOut">
               <a:rPr lang="ru-RU" smtClean="0"/>
-              <a:t>22.03.2026</a:t>
+              <a:pPr/>
+              <a:t>23.03.2026</a:t>
             </a:fld>
             <a:endParaRPr lang="ru-RU"/>
           </a:p>
@@ -2255,6 +2283,7 @@
           <a:p>
             <a:fld id="{1C2EDCFD-5AFD-456C-A5F9-E4C1C95E2D1F}" type="slidenum">
               <a:rPr lang="ru-RU" smtClean="0"/>
+              <a:pPr/>
               <a:t>‹#›</a:t>
             </a:fld>
             <a:endParaRPr lang="ru-RU"/>
@@ -2461,7 +2490,8 @@
           <a:p>
             <a:fld id="{8E5164BE-D66A-4271-84DB-1DFB15F9F296}" type="datetimeFigureOut">
               <a:rPr lang="ru-RU" smtClean="0"/>
-              <a:t>22.03.2026</a:t>
+              <a:pPr/>
+              <a:t>23.03.2026</a:t>
             </a:fld>
             <a:endParaRPr lang="ru-RU"/>
           </a:p>
@@ -2503,6 +2533,7 @@
           <a:p>
             <a:fld id="{1C2EDCFD-5AFD-456C-A5F9-E4C1C95E2D1F}" type="slidenum">
               <a:rPr lang="ru-RU" smtClean="0"/>
+              <a:pPr/>
               <a:t>‹#›</a:t>
             </a:fld>
             <a:endParaRPr lang="ru-RU"/>
@@ -2669,7 +2700,8 @@
           <a:p>
             <a:fld id="{8E5164BE-D66A-4271-84DB-1DFB15F9F296}" type="datetimeFigureOut">
               <a:rPr lang="ru-RU" smtClean="0"/>
-              <a:t>22.03.2026</a:t>
+              <a:pPr/>
+              <a:t>23.03.2026</a:t>
             </a:fld>
             <a:endParaRPr lang="ru-RU"/>
           </a:p>
@@ -2747,6 +2779,7 @@
           <a:p>
             <a:fld id="{1C2EDCFD-5AFD-456C-A5F9-E4C1C95E2D1F}" type="slidenum">
               <a:rPr lang="ru-RU" smtClean="0"/>
+              <a:pPr/>
               <a:t>‹#›</a:t>
             </a:fld>
             <a:endParaRPr lang="ru-RU"/>
@@ -3054,29 +3087,1156 @@
           <a:bodyPr/>
           <a:lstStyle/>
           <a:p>
-            <a:endParaRPr lang="ru-RU"/>
-          </a:p>
-        </p:txBody>
-      </p:sp>
-      <p:sp>
-        <p:nvSpPr>
-          <p:cNvPr id="3" name="Подзаголовок 2"/>
-          <p:cNvSpPr>
-            <a:spLocks noGrp="1"/>
-          </p:cNvSpPr>
-          <p:nvPr>
-            <p:ph type="subTitle" idx="1"/>
-          </p:nvPr>
-        </p:nvSpPr>
-        <p:spPr/>
+            <a:r>
+              <a:rPr lang="ru-RU" dirty="0" smtClean="0"/>
+              <a:t>Встроенный язык 1С. Отладчик</a:t>
+            </a:r>
+            <a:endParaRPr lang="ru-RU" dirty="0"/>
+          </a:p>
+        </p:txBody>
+      </p:sp>
+    </p:spTree>
+  </p:cSld>
+  <p:clrMapOvr>
+    <a:masterClrMapping/>
+  </p:clrMapOvr>
+</p:sld>
+</file>
+
+<file path=ppt/slides/slide10.xml><?xml version="1.0" encoding="utf-8"?>
+<p:sld xmlns:a="http://schemas.openxmlformats.org/drawingml/2006/main" xmlns:r="http://schemas.openxmlformats.org/officeDocument/2006/relationships" xmlns:p="http://schemas.openxmlformats.org/presentationml/2006/main">
+  <p:cSld>
+    <p:spTree>
+      <p:nvGrpSpPr>
+        <p:cNvPr id="1" name=""/>
+        <p:cNvGrpSpPr/>
+        <p:nvPr/>
+      </p:nvGrpSpPr>
+      <p:grpSpPr>
+        <a:xfrm>
+          <a:off x="0" y="0"/>
+          <a:ext cx="0" cy="0"/>
+          <a:chOff x="0" y="0"/>
+          <a:chExt cx="0" cy="0"/>
+        </a:xfrm>
+      </p:grpSpPr>
+      <p:sp>
+        <p:nvSpPr>
+          <p:cNvPr id="2" name="Прямоугольник 1"/>
+          <p:cNvSpPr/>
+          <p:nvPr/>
+        </p:nvSpPr>
+        <p:spPr>
+          <a:xfrm>
+            <a:off x="0" y="0"/>
+            <a:ext cx="9144000" cy="1477328"/>
+          </a:xfrm>
+          <a:prstGeom prst="rect">
+            <a:avLst/>
+          </a:prstGeom>
+        </p:spPr>
+        <p:txBody>
+          <a:bodyPr wrap="square">
+            <a:spAutoFit/>
+          </a:bodyPr>
+          <a:lstStyle/>
+          <a:p>
+            <a:pPr algn="just"/>
+            <a:r>
+              <a:rPr lang="ru-RU" dirty="0" smtClean="0">
+                <a:latin typeface="Times New Roman" pitchFamily="18" charset="0"/>
+                <a:cs typeface="Times New Roman" pitchFamily="18" charset="0"/>
+              </a:rPr>
+              <a:t>При отладке программа приостанавливается на точках останова или во время пошагового прохода, что позволяет анализировать текущее состояние переменных. Это даёт возможность отслеживать изменения данных в режиме реального времени и отклонения. Для этого курсор редактора наводят на нужную переменную и в небольшом всплывающем окне отобразится ее текущее значение.</a:t>
+            </a:r>
+            <a:endParaRPr lang="ru-RU" dirty="0">
+              <a:latin typeface="Times New Roman" pitchFamily="18" charset="0"/>
+              <a:cs typeface="Times New Roman" pitchFamily="18" charset="0"/>
+            </a:endParaRPr>
+          </a:p>
+        </p:txBody>
+      </p:sp>
+      <p:pic>
+        <p:nvPicPr>
+          <p:cNvPr id="4" name="Picture 2" descr="https://ucarecdn.stepik.net/85ea5f66-bd0f-48d3-b5ed-4415f6651a4d/"/>
+          <p:cNvPicPr>
+            <a:picLocks noChangeAspect="1" noChangeArrowheads="1"/>
+          </p:cNvPicPr>
+          <p:nvPr/>
+        </p:nvPicPr>
+        <p:blipFill>
+          <a:blip r:embed="rId2"/>
+          <a:srcRect/>
+          <a:stretch>
+            <a:fillRect/>
+          </a:stretch>
+        </p:blipFill>
+        <p:spPr bwMode="auto">
+          <a:xfrm>
+            <a:off x="2571736" y="1500174"/>
+            <a:ext cx="4000488" cy="1773552"/>
+          </a:xfrm>
+          <a:prstGeom prst="rect">
+            <a:avLst/>
+          </a:prstGeom>
+          <a:noFill/>
+        </p:spPr>
+      </p:pic>
+      <p:sp>
+        <p:nvSpPr>
+          <p:cNvPr id="5" name="Прямоугольник 4"/>
+          <p:cNvSpPr/>
+          <p:nvPr/>
+        </p:nvSpPr>
+        <p:spPr>
+          <a:xfrm>
+            <a:off x="0" y="3286124"/>
+            <a:ext cx="9144000" cy="923330"/>
+          </a:xfrm>
+          <a:prstGeom prst="rect">
+            <a:avLst/>
+          </a:prstGeom>
+        </p:spPr>
+        <p:txBody>
+          <a:bodyPr wrap="square">
+            <a:spAutoFit/>
+          </a:bodyPr>
+          <a:lstStyle/>
+          <a:p>
+            <a:pPr algn="just"/>
+            <a:r>
+              <a:rPr lang="ru-RU" dirty="0" smtClean="0">
+                <a:latin typeface="Times New Roman" pitchFamily="18" charset="0"/>
+                <a:cs typeface="Times New Roman" pitchFamily="18" charset="0"/>
+              </a:rPr>
+              <a:t>Следующий способ: мы выделяем курсором название переменной и нажимаем сочетание кнопок "Shift+F9". В результате чего всплывает окно "Выражение", где отражается вся информация о переменной:</a:t>
+            </a:r>
+            <a:endParaRPr lang="ru-RU" dirty="0">
+              <a:latin typeface="Times New Roman" pitchFamily="18" charset="0"/>
+              <a:cs typeface="Times New Roman" pitchFamily="18" charset="0"/>
+            </a:endParaRPr>
+          </a:p>
+        </p:txBody>
+      </p:sp>
+      <p:pic>
+        <p:nvPicPr>
+          <p:cNvPr id="22532" name="Picture 4" descr="https://ucarecdn.stepik.net/29df7058-802c-41be-92f0-11fc30e1869b/"/>
+          <p:cNvPicPr>
+            <a:picLocks noChangeAspect="1" noChangeArrowheads="1"/>
+          </p:cNvPicPr>
+          <p:nvPr/>
+        </p:nvPicPr>
+        <p:blipFill>
+          <a:blip r:embed="rId3"/>
+          <a:srcRect/>
+          <a:stretch>
+            <a:fillRect/>
+          </a:stretch>
+        </p:blipFill>
+        <p:spPr bwMode="auto">
+          <a:xfrm>
+            <a:off x="1214414" y="4286256"/>
+            <a:ext cx="6629390" cy="2460554"/>
+          </a:xfrm>
+          <a:prstGeom prst="rect">
+            <a:avLst/>
+          </a:prstGeom>
+          <a:noFill/>
+        </p:spPr>
+      </p:pic>
+    </p:spTree>
+  </p:cSld>
+  <p:clrMapOvr>
+    <a:masterClrMapping/>
+  </p:clrMapOvr>
+</p:sld>
+</file>
+
+<file path=ppt/slides/slide11.xml><?xml version="1.0" encoding="utf-8"?>
+<p:sld xmlns:a="http://schemas.openxmlformats.org/drawingml/2006/main" xmlns:r="http://schemas.openxmlformats.org/officeDocument/2006/relationships" xmlns:p="http://schemas.openxmlformats.org/presentationml/2006/main">
+  <p:cSld>
+    <p:spTree>
+      <p:nvGrpSpPr>
+        <p:cNvPr id="1" name=""/>
+        <p:cNvGrpSpPr/>
+        <p:nvPr/>
+      </p:nvGrpSpPr>
+      <p:grpSpPr>
+        <a:xfrm>
+          <a:off x="0" y="0"/>
+          <a:ext cx="0" cy="0"/>
+          <a:chOff x="0" y="0"/>
+          <a:chExt cx="0" cy="0"/>
+        </a:xfrm>
+      </p:grpSpPr>
+      <p:sp>
+        <p:nvSpPr>
+          <p:cNvPr id="2" name="Прямоугольник 1"/>
+          <p:cNvSpPr/>
+          <p:nvPr/>
+        </p:nvSpPr>
+        <p:spPr>
+          <a:xfrm>
+            <a:off x="0" y="0"/>
+            <a:ext cx="9144000" cy="1754326"/>
+          </a:xfrm>
+          <a:prstGeom prst="rect">
+            <a:avLst/>
+          </a:prstGeom>
+        </p:spPr>
+        <p:txBody>
+          <a:bodyPr wrap="square">
+            <a:spAutoFit/>
+          </a:bodyPr>
+          <a:lstStyle/>
+          <a:p>
+            <a:pPr algn="just"/>
+            <a:r>
+              <a:rPr lang="ru-RU" b="1" dirty="0" smtClean="0">
+                <a:latin typeface="Times New Roman" pitchFamily="18" charset="0"/>
+                <a:cs typeface="Times New Roman" pitchFamily="18" charset="0"/>
+              </a:rPr>
+              <a:t>Контекстной подсказкой</a:t>
+            </a:r>
+            <a:r>
+              <a:rPr lang="ru-RU" dirty="0" smtClean="0">
+                <a:latin typeface="Times New Roman" pitchFamily="18" charset="0"/>
+                <a:cs typeface="Times New Roman" pitchFamily="18" charset="0"/>
+              </a:rPr>
+              <a:t> мы уже пользовались. Так, при вводе первых символов имени уже объявленной переменной, комбинация клавиш (</a:t>
+            </a:r>
+            <a:r>
+              <a:rPr lang="ru-RU" b="1" dirty="0" err="1" smtClean="0">
+                <a:latin typeface="Times New Roman" pitchFamily="18" charset="0"/>
+                <a:cs typeface="Times New Roman" pitchFamily="18" charset="0"/>
+              </a:rPr>
+              <a:t>Ctrl+Пробел</a:t>
+            </a:r>
+            <a:r>
+              <a:rPr lang="ru-RU" dirty="0" smtClean="0">
+                <a:latin typeface="Times New Roman" pitchFamily="18" charset="0"/>
+                <a:cs typeface="Times New Roman" pitchFamily="18" charset="0"/>
+              </a:rPr>
+              <a:t>) активировала </a:t>
+            </a:r>
+            <a:r>
+              <a:rPr lang="ru-RU" dirty="0" err="1" smtClean="0">
+                <a:latin typeface="Times New Roman" pitchFamily="18" charset="0"/>
+                <a:cs typeface="Times New Roman" pitchFamily="18" charset="0"/>
+              </a:rPr>
+              <a:t>автодополнение</a:t>
+            </a:r>
+            <a:r>
+              <a:rPr lang="ru-RU" dirty="0" smtClean="0">
+                <a:latin typeface="Times New Roman" pitchFamily="18" charset="0"/>
+                <a:cs typeface="Times New Roman" pitchFamily="18" charset="0"/>
+              </a:rPr>
+              <a:t> — система подставляла полный идентификатор в код, избавляя от рутинного набора. ​​​​​​Если  же контекстные подсказки не отображаются, их можно настроить по следующей схеме: Панель инструментов &gt; Сервис &gt; Параметры &gt; Модули &gt; Контекстная подсказка.</a:t>
+            </a:r>
+            <a:endParaRPr lang="ru-RU" dirty="0">
+              <a:latin typeface="Times New Roman" pitchFamily="18" charset="0"/>
+              <a:cs typeface="Times New Roman" pitchFamily="18" charset="0"/>
+            </a:endParaRPr>
+          </a:p>
+        </p:txBody>
+      </p:sp>
+      <p:pic>
+        <p:nvPicPr>
+          <p:cNvPr id="23554" name="Picture 2" descr="https://ucarecdn.stepik.net/6b920551-c575-4597-9b9d-ae7d3000f69b/"/>
+          <p:cNvPicPr>
+            <a:picLocks noChangeAspect="1" noChangeArrowheads="1"/>
+          </p:cNvPicPr>
+          <p:nvPr/>
+        </p:nvPicPr>
+        <p:blipFill>
+          <a:blip r:embed="rId2" cstate="print"/>
+          <a:srcRect/>
+          <a:stretch>
+            <a:fillRect/>
+          </a:stretch>
+        </p:blipFill>
+        <p:spPr bwMode="auto">
+          <a:xfrm>
+            <a:off x="2143108" y="1714488"/>
+            <a:ext cx="4552936" cy="2210292"/>
+          </a:xfrm>
+          <a:prstGeom prst="rect">
+            <a:avLst/>
+          </a:prstGeom>
+          <a:noFill/>
+        </p:spPr>
+      </p:pic>
+      <p:sp>
+        <p:nvSpPr>
+          <p:cNvPr id="4" name="Прямоугольник 3"/>
+          <p:cNvSpPr/>
+          <p:nvPr/>
+        </p:nvSpPr>
+        <p:spPr>
+          <a:xfrm>
+            <a:off x="0" y="3929066"/>
+            <a:ext cx="9144000" cy="1200329"/>
+          </a:xfrm>
+          <a:prstGeom prst="rect">
+            <a:avLst/>
+          </a:prstGeom>
+        </p:spPr>
+        <p:txBody>
+          <a:bodyPr wrap="square">
+            <a:spAutoFit/>
+          </a:bodyPr>
+          <a:lstStyle/>
+          <a:p>
+            <a:pPr algn="just"/>
+            <a:r>
+              <a:rPr lang="ru-RU" dirty="0" smtClean="0">
+                <a:latin typeface="Times New Roman" pitchFamily="18" charset="0"/>
+                <a:cs typeface="Times New Roman" pitchFamily="18" charset="0"/>
+              </a:rPr>
+              <a:t>Объявленные переменные в списке контекстного меню имеют маркер красного цвета. К примеру мы объявим переменную Дата и присвоим ей значение Текущая дата. Если после ввода первых же букв идентификатора переменной (Дат), вызвать контекстную подсказку, получим следующий список: </a:t>
+            </a:r>
+            <a:endParaRPr lang="ru-RU" dirty="0">
+              <a:latin typeface="Times New Roman" pitchFamily="18" charset="0"/>
+              <a:cs typeface="Times New Roman" pitchFamily="18" charset="0"/>
+            </a:endParaRPr>
+          </a:p>
+        </p:txBody>
+      </p:sp>
+      <p:pic>
+        <p:nvPicPr>
+          <p:cNvPr id="23556" name="Picture 4" descr="https://ucarecdn.stepik.net/401c24fd-2370-4b7e-ada9-4aacc305fb0c/"/>
+          <p:cNvPicPr>
+            <a:picLocks noChangeAspect="1" noChangeArrowheads="1"/>
+          </p:cNvPicPr>
+          <p:nvPr/>
+        </p:nvPicPr>
+        <p:blipFill>
+          <a:blip r:embed="rId3"/>
+          <a:srcRect/>
+          <a:stretch>
+            <a:fillRect/>
+          </a:stretch>
+        </p:blipFill>
+        <p:spPr bwMode="auto">
+          <a:xfrm>
+            <a:off x="357159" y="5141904"/>
+            <a:ext cx="2286016" cy="1716096"/>
+          </a:xfrm>
+          <a:prstGeom prst="rect">
+            <a:avLst/>
+          </a:prstGeom>
+          <a:noFill/>
+        </p:spPr>
+      </p:pic>
+      <p:sp>
+        <p:nvSpPr>
+          <p:cNvPr id="6" name="Прямоугольник 5"/>
+          <p:cNvSpPr/>
+          <p:nvPr/>
+        </p:nvSpPr>
+        <p:spPr>
+          <a:xfrm>
+            <a:off x="2857488" y="5214950"/>
+            <a:ext cx="5715008" cy="1477328"/>
+          </a:xfrm>
+          <a:prstGeom prst="rect">
+            <a:avLst/>
+          </a:prstGeom>
+        </p:spPr>
+        <p:txBody>
+          <a:bodyPr wrap="square">
+            <a:spAutoFit/>
+          </a:bodyPr>
+          <a:lstStyle/>
+          <a:p>
+            <a:pPr algn="just"/>
+            <a:r>
+              <a:rPr lang="ru-RU" dirty="0" smtClean="0">
+                <a:latin typeface="Times New Roman" pitchFamily="18" charset="0"/>
+                <a:cs typeface="Times New Roman" pitchFamily="18" charset="0"/>
+              </a:rPr>
+              <a:t>Красный маркер впереди идентификатора "Дата" означает что эта переменная уже была объявлена в тексте и опознана системой, а при необходимости  можно с помощью нажатия клавиши </a:t>
+            </a:r>
+            <a:r>
+              <a:rPr lang="ru-RU" dirty="0" err="1" smtClean="0">
+                <a:latin typeface="Times New Roman" pitchFamily="18" charset="0"/>
+                <a:cs typeface="Times New Roman" pitchFamily="18" charset="0"/>
+              </a:rPr>
+              <a:t>Enter</a:t>
+            </a:r>
+            <a:r>
+              <a:rPr lang="ru-RU" dirty="0" smtClean="0">
+                <a:latin typeface="Times New Roman" pitchFamily="18" charset="0"/>
+                <a:cs typeface="Times New Roman" pitchFamily="18" charset="0"/>
+              </a:rPr>
+              <a:t> добавить ее еще раз в код.</a:t>
+            </a:r>
+            <a:endParaRPr lang="ru-RU" dirty="0">
+              <a:latin typeface="Times New Roman" pitchFamily="18" charset="0"/>
+              <a:cs typeface="Times New Roman" pitchFamily="18" charset="0"/>
+            </a:endParaRPr>
+          </a:p>
+        </p:txBody>
+      </p:sp>
+    </p:spTree>
+  </p:cSld>
+  <p:clrMapOvr>
+    <a:masterClrMapping/>
+  </p:clrMapOvr>
+</p:sld>
+</file>
+
+<file path=ppt/slides/slide12.xml><?xml version="1.0" encoding="utf-8"?>
+<p:sld xmlns:a="http://schemas.openxmlformats.org/drawingml/2006/main" xmlns:r="http://schemas.openxmlformats.org/officeDocument/2006/relationships" xmlns:p="http://schemas.openxmlformats.org/presentationml/2006/main">
+  <p:cSld>
+    <p:spTree>
+      <p:nvGrpSpPr>
+        <p:cNvPr id="1" name=""/>
+        <p:cNvGrpSpPr/>
+        <p:nvPr/>
+      </p:nvGrpSpPr>
+      <p:grpSpPr>
+        <a:xfrm>
+          <a:off x="0" y="0"/>
+          <a:ext cx="0" cy="0"/>
+          <a:chOff x="0" y="0"/>
+          <a:chExt cx="0" cy="0"/>
+        </a:xfrm>
+      </p:grpSpPr>
+      <p:sp>
+        <p:nvSpPr>
+          <p:cNvPr id="2" name="Прямоугольник 1"/>
+          <p:cNvSpPr/>
+          <p:nvPr/>
+        </p:nvSpPr>
+        <p:spPr>
+          <a:xfrm>
+            <a:off x="0" y="0"/>
+            <a:ext cx="9144000" cy="646331"/>
+          </a:xfrm>
+          <a:prstGeom prst="rect">
+            <a:avLst/>
+          </a:prstGeom>
+        </p:spPr>
+        <p:txBody>
+          <a:bodyPr wrap="square">
+            <a:spAutoFit/>
+          </a:bodyPr>
+          <a:lstStyle/>
+          <a:p>
+            <a:pPr algn="just"/>
+            <a:r>
+              <a:rPr lang="ru-RU" dirty="0" smtClean="0">
+                <a:latin typeface="Times New Roman" pitchFamily="18" charset="0"/>
+                <a:cs typeface="Times New Roman" pitchFamily="18" charset="0"/>
+              </a:rPr>
+              <a:t>Теперь присвоим переменной Дата значение функции Текущая Дата, используя опять-таки контекстную подсказку: </a:t>
+            </a:r>
+            <a:endParaRPr lang="ru-RU" dirty="0">
+              <a:latin typeface="Times New Roman" pitchFamily="18" charset="0"/>
+              <a:cs typeface="Times New Roman" pitchFamily="18" charset="0"/>
+            </a:endParaRPr>
+          </a:p>
+        </p:txBody>
+      </p:sp>
+      <p:pic>
+        <p:nvPicPr>
+          <p:cNvPr id="24578" name="Picture 2" descr="https://ucarecdn.stepik.net/b1bf85bb-d796-4aad-85fb-124217acfb0e/"/>
+          <p:cNvPicPr>
+            <a:picLocks noChangeAspect="1" noChangeArrowheads="1"/>
+          </p:cNvPicPr>
+          <p:nvPr/>
+        </p:nvPicPr>
+        <p:blipFill>
+          <a:blip r:embed="rId2"/>
+          <a:srcRect/>
+          <a:stretch>
+            <a:fillRect/>
+          </a:stretch>
+        </p:blipFill>
+        <p:spPr bwMode="auto">
+          <a:xfrm>
+            <a:off x="2857488" y="500042"/>
+            <a:ext cx="2695568" cy="1806310"/>
+          </a:xfrm>
+          <a:prstGeom prst="rect">
+            <a:avLst/>
+          </a:prstGeom>
+          <a:noFill/>
+        </p:spPr>
+      </p:pic>
+      <p:sp>
+        <p:nvSpPr>
+          <p:cNvPr id="4" name="Прямоугольник 3"/>
+          <p:cNvSpPr/>
+          <p:nvPr/>
+        </p:nvSpPr>
+        <p:spPr>
+          <a:xfrm>
+            <a:off x="0" y="2285992"/>
+            <a:ext cx="9144000" cy="1477328"/>
+          </a:xfrm>
+          <a:prstGeom prst="rect">
+            <a:avLst/>
+          </a:prstGeom>
+        </p:spPr>
+        <p:txBody>
+          <a:bodyPr wrap="square">
+            <a:spAutoFit/>
+          </a:bodyPr>
+          <a:lstStyle/>
+          <a:p>
+            <a:pPr algn="just"/>
+            <a:r>
+              <a:rPr lang="ru-RU" dirty="0" smtClean="0">
+                <a:latin typeface="Times New Roman" pitchFamily="18" charset="0"/>
+                <a:cs typeface="Times New Roman" pitchFamily="18" charset="0"/>
+              </a:rPr>
+              <a:t>При вводе параметров подсказка может иной раз исчезнуть, тогда заново ее вызывают с помощью сочетания клавиш </a:t>
+            </a:r>
+            <a:r>
+              <a:rPr lang="ru-RU" b="1" dirty="0" err="1" smtClean="0">
+                <a:latin typeface="Times New Roman" pitchFamily="18" charset="0"/>
+                <a:cs typeface="Times New Roman" pitchFamily="18" charset="0"/>
+              </a:rPr>
+              <a:t>Ctrl</a:t>
+            </a:r>
+            <a:r>
+              <a:rPr lang="ru-RU" b="1" dirty="0" smtClean="0">
+                <a:latin typeface="Times New Roman" pitchFamily="18" charset="0"/>
+                <a:cs typeface="Times New Roman" pitchFamily="18" charset="0"/>
+              </a:rPr>
+              <a:t> + </a:t>
+            </a:r>
+            <a:r>
+              <a:rPr lang="ru-RU" b="1" dirty="0" err="1" smtClean="0">
+                <a:latin typeface="Times New Roman" pitchFamily="18" charset="0"/>
+                <a:cs typeface="Times New Roman" pitchFamily="18" charset="0"/>
+              </a:rPr>
+              <a:t>Shift</a:t>
+            </a:r>
+            <a:r>
+              <a:rPr lang="ru-RU" b="1" dirty="0" smtClean="0">
+                <a:latin typeface="Times New Roman" pitchFamily="18" charset="0"/>
+                <a:cs typeface="Times New Roman" pitchFamily="18" charset="0"/>
+              </a:rPr>
+              <a:t> + Пробел</a:t>
+            </a:r>
+            <a:endParaRPr lang="en-US" b="1" dirty="0" smtClean="0">
+              <a:latin typeface="Times New Roman" pitchFamily="18" charset="0"/>
+              <a:cs typeface="Times New Roman" pitchFamily="18" charset="0"/>
+            </a:endParaRPr>
+          </a:p>
+          <a:p>
+            <a:pPr algn="just"/>
+            <a:r>
+              <a:rPr lang="ru-RU" dirty="0" smtClean="0">
+                <a:latin typeface="Times New Roman" pitchFamily="18" charset="0"/>
+                <a:cs typeface="Times New Roman" pitchFamily="18" charset="0"/>
+              </a:rPr>
+              <a:t>Контекстная подсказка срабатывает и когда после объекта встроенного языка в коде мы вставим точку. К примеру мы создали массив, а после с помощью подсказки вызвали и все методы объекта (функции и процедуры)</a:t>
+            </a:r>
+            <a:endParaRPr lang="ru-RU" dirty="0">
+              <a:latin typeface="Times New Roman" pitchFamily="18" charset="0"/>
+              <a:cs typeface="Times New Roman" pitchFamily="18" charset="0"/>
+            </a:endParaRPr>
+          </a:p>
+        </p:txBody>
+      </p:sp>
+      <p:pic>
+        <p:nvPicPr>
+          <p:cNvPr id="24582" name="Picture 6" descr="https://ucarecdn.stepik.net/61a581d3-5798-4794-84df-06622310363c/"/>
+          <p:cNvPicPr>
+            <a:picLocks noChangeAspect="1" noChangeArrowheads="1"/>
+          </p:cNvPicPr>
+          <p:nvPr/>
+        </p:nvPicPr>
+        <p:blipFill>
+          <a:blip r:embed="rId3"/>
+          <a:srcRect/>
+          <a:stretch>
+            <a:fillRect/>
+          </a:stretch>
+        </p:blipFill>
+        <p:spPr bwMode="auto">
+          <a:xfrm>
+            <a:off x="0" y="3786190"/>
+            <a:ext cx="5314950" cy="2800351"/>
+          </a:xfrm>
+          <a:prstGeom prst="rect">
+            <a:avLst/>
+          </a:prstGeom>
+          <a:noFill/>
+        </p:spPr>
+      </p:pic>
+      <p:sp>
+        <p:nvSpPr>
+          <p:cNvPr id="8" name="Прямоугольник 7"/>
+          <p:cNvSpPr/>
+          <p:nvPr/>
+        </p:nvSpPr>
+        <p:spPr>
+          <a:xfrm>
+            <a:off x="5286380" y="4000504"/>
+            <a:ext cx="3857620" cy="2308324"/>
+          </a:xfrm>
+          <a:prstGeom prst="rect">
+            <a:avLst/>
+          </a:prstGeom>
+        </p:spPr>
+        <p:txBody>
+          <a:bodyPr wrap="square">
+            <a:spAutoFit/>
+          </a:bodyPr>
+          <a:lstStyle/>
+          <a:p>
+            <a:pPr algn="just"/>
+            <a:r>
+              <a:rPr lang="ru-RU" dirty="0" smtClean="0">
+                <a:latin typeface="Times New Roman" pitchFamily="18" charset="0"/>
+                <a:cs typeface="Times New Roman" pitchFamily="18" charset="0"/>
+              </a:rPr>
+              <a:t>Можно аналогично вставить в код любой объект 1С, включая объекты метаданных (справочники, документы и т.д.),  а затем с помощью точки вызвать контекстное меню со всеми методами и свойствами, присущими для данного объекта.</a:t>
+            </a:r>
+            <a:endParaRPr lang="ru-RU" dirty="0">
+              <a:latin typeface="Times New Roman" pitchFamily="18" charset="0"/>
+              <a:cs typeface="Times New Roman" pitchFamily="18" charset="0"/>
+            </a:endParaRPr>
+          </a:p>
+        </p:txBody>
+      </p:sp>
+    </p:spTree>
+  </p:cSld>
+  <p:clrMapOvr>
+    <a:masterClrMapping/>
+  </p:clrMapOvr>
+</p:sld>
+</file>
+
+<file path=ppt/slides/slide13.xml><?xml version="1.0" encoding="utf-8"?>
+<p:sld xmlns:a="http://schemas.openxmlformats.org/drawingml/2006/main" xmlns:r="http://schemas.openxmlformats.org/officeDocument/2006/relationships" xmlns:p="http://schemas.openxmlformats.org/presentationml/2006/main">
+  <p:cSld>
+    <p:spTree>
+      <p:nvGrpSpPr>
+        <p:cNvPr id="1" name=""/>
+        <p:cNvGrpSpPr/>
+        <p:nvPr/>
+      </p:nvGrpSpPr>
+      <p:grpSpPr>
+        <a:xfrm>
+          <a:off x="0" y="0"/>
+          <a:ext cx="0" cy="0"/>
+          <a:chOff x="0" y="0"/>
+          <a:chExt cx="0" cy="0"/>
+        </a:xfrm>
+      </p:grpSpPr>
+      <p:sp>
+        <p:nvSpPr>
+          <p:cNvPr id="2" name="Прямоугольник 1"/>
+          <p:cNvSpPr/>
+          <p:nvPr/>
+        </p:nvSpPr>
+        <p:spPr>
+          <a:xfrm>
+            <a:off x="0" y="0"/>
+            <a:ext cx="9144000" cy="923330"/>
+          </a:xfrm>
+          <a:prstGeom prst="rect">
+            <a:avLst/>
+          </a:prstGeom>
+        </p:spPr>
+        <p:txBody>
+          <a:bodyPr wrap="square">
+            <a:spAutoFit/>
+          </a:bodyPr>
+          <a:lstStyle/>
+          <a:p>
+            <a:pPr algn="just"/>
+            <a:r>
+              <a:rPr lang="ru-RU" dirty="0" smtClean="0">
+                <a:latin typeface="Times New Roman" pitchFamily="18" charset="0"/>
+                <a:cs typeface="Times New Roman" pitchFamily="18" charset="0"/>
+              </a:rPr>
+              <a:t>   </a:t>
+            </a:r>
+            <a:r>
+              <a:rPr lang="ru-RU" dirty="0" err="1" smtClean="0">
+                <a:latin typeface="Times New Roman" pitchFamily="18" charset="0"/>
+                <a:cs typeface="Times New Roman" pitchFamily="18" charset="0"/>
+              </a:rPr>
+              <a:t>Синтакс-помощник</a:t>
+            </a:r>
+            <a:r>
+              <a:rPr lang="ru-RU" dirty="0" smtClean="0">
+                <a:latin typeface="Times New Roman" pitchFamily="18" charset="0"/>
+                <a:cs typeface="Times New Roman" pitchFamily="18" charset="0"/>
+              </a:rPr>
+              <a:t> в первую очередь часть встроенной справки. К </a:t>
+            </a:r>
+            <a:r>
+              <a:rPr lang="ru-RU" dirty="0" err="1" smtClean="0">
+                <a:latin typeface="Times New Roman" pitchFamily="18" charset="0"/>
+                <a:cs typeface="Times New Roman" pitchFamily="18" charset="0"/>
+              </a:rPr>
+              <a:t>синтакс-помощнику</a:t>
+            </a:r>
+            <a:r>
+              <a:rPr lang="ru-RU" dirty="0" smtClean="0">
+                <a:latin typeface="Times New Roman" pitchFamily="18" charset="0"/>
+                <a:cs typeface="Times New Roman" pitchFamily="18" charset="0"/>
+              </a:rPr>
+              <a:t> можно обратиться  либо через меню </a:t>
+            </a:r>
+            <a:r>
+              <a:rPr lang="ru-RU" b="1" dirty="0" smtClean="0">
+                <a:latin typeface="Times New Roman" pitchFamily="18" charset="0"/>
+                <a:cs typeface="Times New Roman" pitchFamily="18" charset="0"/>
+              </a:rPr>
+              <a:t>Справка</a:t>
+            </a:r>
+            <a:r>
+              <a:rPr lang="en-US" dirty="0" smtClean="0">
+                <a:latin typeface="Times New Roman" pitchFamily="18" charset="0"/>
+                <a:cs typeface="Times New Roman" pitchFamily="18" charset="0"/>
+              </a:rPr>
+              <a:t>. </a:t>
+            </a:r>
+            <a:r>
+              <a:rPr lang="ru-RU" dirty="0" smtClean="0">
+                <a:latin typeface="Times New Roman" pitchFamily="18" charset="0"/>
+                <a:cs typeface="Times New Roman" pitchFamily="18" charset="0"/>
+              </a:rPr>
+              <a:t>Либо вызывается с клавиатуры (</a:t>
+            </a:r>
+            <a:r>
+              <a:rPr lang="ru-RU" dirty="0" err="1" smtClean="0">
+                <a:latin typeface="Times New Roman" pitchFamily="18" charset="0"/>
+                <a:cs typeface="Times New Roman" pitchFamily="18" charset="0"/>
+              </a:rPr>
+              <a:t>Ctrl</a:t>
+            </a:r>
+            <a:r>
+              <a:rPr lang="ru-RU" dirty="0" smtClean="0">
+                <a:latin typeface="Times New Roman" pitchFamily="18" charset="0"/>
+                <a:cs typeface="Times New Roman" pitchFamily="18" charset="0"/>
+              </a:rPr>
+              <a:t> + </a:t>
+            </a:r>
+            <a:r>
+              <a:rPr lang="ru-RU" dirty="0" err="1" smtClean="0">
+                <a:latin typeface="Times New Roman" pitchFamily="18" charset="0"/>
+                <a:cs typeface="Times New Roman" pitchFamily="18" charset="0"/>
+              </a:rPr>
+              <a:t>Shift</a:t>
+            </a:r>
+            <a:r>
+              <a:rPr lang="ru-RU" dirty="0" smtClean="0">
+                <a:latin typeface="Times New Roman" pitchFamily="18" charset="0"/>
+                <a:cs typeface="Times New Roman" pitchFamily="18" charset="0"/>
+              </a:rPr>
+              <a:t> + F1), либо в командной панели нажимаем  на иконку  данного инструмента.</a:t>
+            </a:r>
+            <a:endParaRPr lang="ru-RU" dirty="0">
+              <a:latin typeface="Times New Roman" pitchFamily="18" charset="0"/>
+              <a:cs typeface="Times New Roman" pitchFamily="18" charset="0"/>
+            </a:endParaRPr>
+          </a:p>
+        </p:txBody>
+      </p:sp>
+      <p:pic>
+        <p:nvPicPr>
+          <p:cNvPr id="25602" name="Picture 2" descr="https://ucarecdn.stepik.net/0071104b-08a4-4a81-91dc-22df7ae90aed/"/>
+          <p:cNvPicPr>
+            <a:picLocks noChangeAspect="1" noChangeArrowheads="1"/>
+          </p:cNvPicPr>
+          <p:nvPr/>
+        </p:nvPicPr>
+        <p:blipFill>
+          <a:blip r:embed="rId2"/>
+          <a:srcRect/>
+          <a:stretch>
+            <a:fillRect/>
+          </a:stretch>
+        </p:blipFill>
+        <p:spPr bwMode="auto">
+          <a:xfrm>
+            <a:off x="1571604" y="928670"/>
+            <a:ext cx="2205032" cy="1790711"/>
+          </a:xfrm>
+          <a:prstGeom prst="rect">
+            <a:avLst/>
+          </a:prstGeom>
+          <a:noFill/>
+        </p:spPr>
+      </p:pic>
+      <p:pic>
+        <p:nvPicPr>
+          <p:cNvPr id="25604" name="Picture 4" descr="https://ucarecdn.stepik.net/949f9609-143e-47a5-adf8-01ee47036a09/"/>
+          <p:cNvPicPr>
+            <a:picLocks noChangeAspect="1" noChangeArrowheads="1"/>
+          </p:cNvPicPr>
+          <p:nvPr/>
+        </p:nvPicPr>
+        <p:blipFill>
+          <a:blip r:embed="rId3"/>
+          <a:srcRect/>
+          <a:stretch>
+            <a:fillRect/>
+          </a:stretch>
+        </p:blipFill>
+        <p:spPr bwMode="auto">
+          <a:xfrm>
+            <a:off x="4572000" y="1142984"/>
+            <a:ext cx="3181350" cy="628651"/>
+          </a:xfrm>
+          <a:prstGeom prst="rect">
+            <a:avLst/>
+          </a:prstGeom>
+          <a:noFill/>
+        </p:spPr>
+      </p:pic>
+      <p:sp>
+        <p:nvSpPr>
+          <p:cNvPr id="7" name="Прямоугольник 6"/>
+          <p:cNvSpPr/>
+          <p:nvPr/>
+        </p:nvSpPr>
+        <p:spPr>
+          <a:xfrm>
+            <a:off x="0" y="2643182"/>
+            <a:ext cx="9144000" cy="646331"/>
+          </a:xfrm>
+          <a:prstGeom prst="rect">
+            <a:avLst/>
+          </a:prstGeom>
+        </p:spPr>
+        <p:txBody>
+          <a:bodyPr wrap="square">
+            <a:spAutoFit/>
+          </a:bodyPr>
+          <a:lstStyle/>
+          <a:p>
+            <a:pPr algn="just"/>
+            <a:r>
+              <a:rPr lang="ru-RU" dirty="0" smtClean="0">
+                <a:latin typeface="Times New Roman" pitchFamily="18" charset="0"/>
+                <a:cs typeface="Times New Roman" pitchFamily="18" charset="0"/>
+              </a:rPr>
+              <a:t> </a:t>
+            </a:r>
+            <a:r>
+              <a:rPr lang="ru-RU" dirty="0" err="1" smtClean="0">
+                <a:latin typeface="Times New Roman" pitchFamily="18" charset="0"/>
+                <a:cs typeface="Times New Roman" pitchFamily="18" charset="0"/>
+              </a:rPr>
+              <a:t>Синтакс-помощник</a:t>
+            </a:r>
+            <a:r>
+              <a:rPr lang="ru-RU" dirty="0" smtClean="0">
+                <a:latin typeface="Times New Roman" pitchFamily="18" charset="0"/>
+                <a:cs typeface="Times New Roman" pitchFamily="18" charset="0"/>
+              </a:rPr>
+              <a:t> не просто показывает информацию – он связывает все элементы встроенного языка удобными гиперссылками для навигации в один клик.</a:t>
+            </a:r>
+            <a:endParaRPr lang="ru-RU" dirty="0">
+              <a:latin typeface="Times New Roman" pitchFamily="18" charset="0"/>
+              <a:cs typeface="Times New Roman" pitchFamily="18" charset="0"/>
+            </a:endParaRPr>
+          </a:p>
+        </p:txBody>
+      </p:sp>
+      <p:pic>
+        <p:nvPicPr>
+          <p:cNvPr id="25608" name="Picture 8" descr="https://ucarecdn.stepik.net/ba2833bb-aefc-4e61-8332-b28d721fd227/"/>
+          <p:cNvPicPr>
+            <a:picLocks noChangeAspect="1" noChangeArrowheads="1"/>
+          </p:cNvPicPr>
+          <p:nvPr/>
+        </p:nvPicPr>
+        <p:blipFill>
+          <a:blip r:embed="rId4"/>
+          <a:srcRect/>
+          <a:stretch>
+            <a:fillRect/>
+          </a:stretch>
+        </p:blipFill>
+        <p:spPr bwMode="auto">
+          <a:xfrm>
+            <a:off x="928662" y="3286124"/>
+            <a:ext cx="3007230" cy="3429024"/>
+          </a:xfrm>
+          <a:prstGeom prst="rect">
+            <a:avLst/>
+          </a:prstGeom>
+          <a:noFill/>
+        </p:spPr>
+      </p:pic>
+      <p:pic>
+        <p:nvPicPr>
+          <p:cNvPr id="25610" name="Picture 10" descr="https://ucarecdn.stepik.net/89aa3689-6628-483d-9e4a-d7df16bbd8d4/"/>
+          <p:cNvPicPr>
+            <a:picLocks noChangeAspect="1" noChangeArrowheads="1"/>
+          </p:cNvPicPr>
+          <p:nvPr/>
+        </p:nvPicPr>
+        <p:blipFill>
+          <a:blip r:embed="rId5"/>
+          <a:srcRect/>
+          <a:stretch>
+            <a:fillRect/>
+          </a:stretch>
+        </p:blipFill>
+        <p:spPr bwMode="auto">
+          <a:xfrm>
+            <a:off x="4500562" y="3357562"/>
+            <a:ext cx="3178854" cy="3357586"/>
+          </a:xfrm>
+          <a:prstGeom prst="rect">
+            <a:avLst/>
+          </a:prstGeom>
+          <a:noFill/>
+        </p:spPr>
+      </p:pic>
+    </p:spTree>
+  </p:cSld>
+  <p:clrMapOvr>
+    <a:masterClrMapping/>
+  </p:clrMapOvr>
+</p:sld>
+</file>
+
+<file path=ppt/slides/slide14.xml><?xml version="1.0" encoding="utf-8"?>
+<p:sld xmlns:a="http://schemas.openxmlformats.org/drawingml/2006/main" xmlns:r="http://schemas.openxmlformats.org/officeDocument/2006/relationships" xmlns:p="http://schemas.openxmlformats.org/presentationml/2006/main">
+  <p:cSld>
+    <p:spTree>
+      <p:nvGrpSpPr>
+        <p:cNvPr id="1" name=""/>
+        <p:cNvGrpSpPr/>
+        <p:nvPr/>
+      </p:nvGrpSpPr>
+      <p:grpSpPr>
+        <a:xfrm>
+          <a:off x="0" y="0"/>
+          <a:ext cx="0" cy="0"/>
+          <a:chOff x="0" y="0"/>
+          <a:chExt cx="0" cy="0"/>
+        </a:xfrm>
+      </p:grpSpPr>
+      <p:sp>
+        <p:nvSpPr>
+          <p:cNvPr id="2" name="Заголовок 1"/>
+          <p:cNvSpPr txBox="1">
+            <a:spLocks/>
+          </p:cNvSpPr>
+          <p:nvPr/>
+        </p:nvSpPr>
+        <p:spPr>
+          <a:xfrm>
+            <a:off x="428596" y="-142900"/>
+            <a:ext cx="8229600" cy="1143000"/>
+          </a:xfrm>
+          <a:prstGeom prst="rect">
+            <a:avLst/>
+          </a:prstGeom>
+        </p:spPr>
         <p:txBody>
           <a:bodyPr/>
           <a:lstStyle/>
           <a:p>
-            <a:endParaRPr lang="ru-RU"/>
-          </a:p>
-        </p:txBody>
-      </p:sp>
+            <a:pPr lvl="0" algn="ctr">
+              <a:spcBef>
+                <a:spcPct val="0"/>
+              </a:spcBef>
+            </a:pPr>
+            <a:r>
+              <a:rPr lang="ru-RU" sz="3200" dirty="0" smtClean="0">
+                <a:latin typeface="+mj-lt"/>
+                <a:ea typeface="+mj-ea"/>
+                <a:cs typeface="+mj-cs"/>
+              </a:rPr>
+              <a:t>Оперативный доступ к справочной информации при работе с кодом</a:t>
+            </a:r>
+          </a:p>
+        </p:txBody>
+      </p:sp>
+      <p:pic>
+        <p:nvPicPr>
+          <p:cNvPr id="26626" name="Picture 2" descr="https://ucarecdn.stepik.net/7ed059d3-fbdb-486c-89c2-e2e04dfd82e3/"/>
+          <p:cNvPicPr>
+            <a:picLocks noChangeAspect="1" noChangeArrowheads="1"/>
+          </p:cNvPicPr>
+          <p:nvPr/>
+        </p:nvPicPr>
+        <p:blipFill>
+          <a:blip r:embed="rId2"/>
+          <a:srcRect/>
+          <a:stretch>
+            <a:fillRect/>
+          </a:stretch>
+        </p:blipFill>
+        <p:spPr bwMode="auto">
+          <a:xfrm>
+            <a:off x="0" y="928670"/>
+            <a:ext cx="3857652" cy="2481109"/>
+          </a:xfrm>
+          <a:prstGeom prst="rect">
+            <a:avLst/>
+          </a:prstGeom>
+          <a:noFill/>
+        </p:spPr>
+      </p:pic>
+      <p:sp>
+        <p:nvSpPr>
+          <p:cNvPr id="4" name="Прямоугольник 3"/>
+          <p:cNvSpPr/>
+          <p:nvPr/>
+        </p:nvSpPr>
+        <p:spPr>
+          <a:xfrm>
+            <a:off x="4214810" y="928670"/>
+            <a:ext cx="4929190" cy="1477328"/>
+          </a:xfrm>
+          <a:prstGeom prst="rect">
+            <a:avLst/>
+          </a:prstGeom>
+        </p:spPr>
+        <p:txBody>
+          <a:bodyPr wrap="square">
+            <a:spAutoFit/>
+          </a:bodyPr>
+          <a:lstStyle/>
+          <a:p>
+            <a:pPr algn="just"/>
+            <a:r>
+              <a:rPr lang="ru-RU" dirty="0" smtClean="0">
+                <a:latin typeface="Times New Roman" pitchFamily="18" charset="0"/>
+                <a:cs typeface="Times New Roman" pitchFamily="18" charset="0"/>
+              </a:rPr>
+              <a:t>Чтобы закрепить результат, воспользуемся кнопкой </a:t>
+            </a:r>
+            <a:r>
+              <a:rPr lang="ru-RU" b="1" dirty="0" smtClean="0">
+                <a:latin typeface="Times New Roman" pitchFamily="18" charset="0"/>
+                <a:cs typeface="Times New Roman" pitchFamily="18" charset="0"/>
+              </a:rPr>
+              <a:t>«Найти текущий элемент в дереве». </a:t>
+            </a:r>
+            <a:r>
+              <a:rPr lang="ru-RU" dirty="0" smtClean="0">
+                <a:latin typeface="Times New Roman" pitchFamily="18" charset="0"/>
+                <a:cs typeface="Times New Roman" pitchFamily="18" charset="0"/>
+              </a:rPr>
+              <a:t>Это действие развернет дерево справки именно на том фрагменте кода, с которым мы работаем.</a:t>
+            </a:r>
+            <a:endParaRPr lang="ru-RU" dirty="0">
+              <a:latin typeface="Times New Roman" pitchFamily="18" charset="0"/>
+              <a:cs typeface="Times New Roman" pitchFamily="18" charset="0"/>
+            </a:endParaRPr>
+          </a:p>
+        </p:txBody>
+      </p:sp>
+      <p:pic>
+        <p:nvPicPr>
+          <p:cNvPr id="26628" name="Picture 4" descr="https://ucarecdn.stepik.net/467bfdaf-e4da-405f-8bbc-75acb885e7ef/"/>
+          <p:cNvPicPr>
+            <a:picLocks noChangeAspect="1" noChangeArrowheads="1"/>
+          </p:cNvPicPr>
+          <p:nvPr/>
+        </p:nvPicPr>
+        <p:blipFill>
+          <a:blip r:embed="rId3"/>
+          <a:srcRect/>
+          <a:stretch>
+            <a:fillRect/>
+          </a:stretch>
+        </p:blipFill>
+        <p:spPr bwMode="auto">
+          <a:xfrm>
+            <a:off x="4500562" y="2357430"/>
+            <a:ext cx="4553012" cy="2786082"/>
+          </a:xfrm>
+          <a:prstGeom prst="rect">
+            <a:avLst/>
+          </a:prstGeom>
+          <a:noFill/>
+        </p:spPr>
+      </p:pic>
+      <p:sp>
+        <p:nvSpPr>
+          <p:cNvPr id="6" name="Прямоугольник 5"/>
+          <p:cNvSpPr/>
+          <p:nvPr/>
+        </p:nvSpPr>
+        <p:spPr>
+          <a:xfrm>
+            <a:off x="0" y="3500438"/>
+            <a:ext cx="4572000" cy="1200329"/>
+          </a:xfrm>
+          <a:prstGeom prst="rect">
+            <a:avLst/>
+          </a:prstGeom>
+        </p:spPr>
+        <p:txBody>
+          <a:bodyPr>
+            <a:spAutoFit/>
+          </a:bodyPr>
+          <a:lstStyle/>
+          <a:p>
+            <a:pPr algn="just"/>
+            <a:r>
+              <a:rPr lang="ru-RU" dirty="0" smtClean="0">
+                <a:latin typeface="Times New Roman" pitchFamily="18" charset="0"/>
+                <a:cs typeface="Times New Roman" pitchFamily="18" charset="0"/>
+              </a:rPr>
+              <a:t>Чтобы вставить готовые конструкции встроенного языка, просто перетащим их из </a:t>
+            </a:r>
+            <a:r>
+              <a:rPr lang="ru-RU" dirty="0" err="1" smtClean="0">
+                <a:latin typeface="Times New Roman" pitchFamily="18" charset="0"/>
+                <a:cs typeface="Times New Roman" pitchFamily="18" charset="0"/>
+              </a:rPr>
+              <a:t>синтакс-помощника</a:t>
+            </a:r>
+            <a:r>
+              <a:rPr lang="ru-RU" dirty="0" smtClean="0">
+                <a:latin typeface="Times New Roman" pitchFamily="18" charset="0"/>
+                <a:cs typeface="Times New Roman" pitchFamily="18" charset="0"/>
+              </a:rPr>
+              <a:t> в модуль — это быстро и удобно.</a:t>
+            </a:r>
+            <a:endParaRPr lang="ru-RU" dirty="0">
+              <a:latin typeface="Times New Roman" pitchFamily="18" charset="0"/>
+              <a:cs typeface="Times New Roman" pitchFamily="18" charset="0"/>
+            </a:endParaRPr>
+          </a:p>
+        </p:txBody>
+      </p:sp>
+      <p:pic>
+        <p:nvPicPr>
+          <p:cNvPr id="26630" name="Picture 6" descr="https://ucarecdn.stepik.net/ced87dfb-7634-4d24-932e-861bee8cbc76/"/>
+          <p:cNvPicPr>
+            <a:picLocks noChangeAspect="1" noChangeArrowheads="1"/>
+          </p:cNvPicPr>
+          <p:nvPr/>
+        </p:nvPicPr>
+        <p:blipFill>
+          <a:blip r:embed="rId4"/>
+          <a:srcRect/>
+          <a:stretch>
+            <a:fillRect/>
+          </a:stretch>
+        </p:blipFill>
+        <p:spPr bwMode="auto">
+          <a:xfrm>
+            <a:off x="0" y="4714884"/>
+            <a:ext cx="4552790" cy="2143116"/>
+          </a:xfrm>
+          <a:prstGeom prst="rect">
+            <a:avLst/>
+          </a:prstGeom>
+          <a:noFill/>
+        </p:spPr>
+      </p:pic>
     </p:spTree>
   </p:cSld>
   <p:clrMapOvr>
@@ -3114,7 +4274,7 @@
         </p:nvSpPr>
         <p:spPr>
           <a:xfrm>
-            <a:off x="457200" y="-357214"/>
+            <a:off x="457200" y="-24"/>
             <a:ext cx="8229600" cy="1143000"/>
           </a:xfrm>
         </p:spPr>
@@ -3124,7 +4284,7 @@
           <a:p>
             <a:r>
               <a:rPr lang="ru-RU" dirty="0" smtClean="0"/>
-              <a:t>ЕСЛИ</a:t>
+              <a:t>Дополнительная литература</a:t>
             </a:r>
             <a:endParaRPr lang="ru-RU" dirty="0"/>
           </a:p>
@@ -3139,7 +4299,7 @@
         <p:spPr>
           <a:xfrm>
             <a:off x="0" y="857232"/>
-            <a:ext cx="3357554" cy="3139321"/>
+            <a:ext cx="9144000" cy="5509200"/>
           </a:xfrm>
           <a:prstGeom prst="rect">
             <a:avLst/>
@@ -3153,113 +4313,182 @@
           <a:p>
             <a:pPr algn="just"/>
             <a:r>
-              <a:rPr lang="ru-RU" dirty="0" smtClean="0">
-                <a:latin typeface="Times New Roman" pitchFamily="18" charset="0"/>
-                <a:cs typeface="Times New Roman" pitchFamily="18" charset="0"/>
-              </a:rPr>
-              <a:t>Оператор </a:t>
-            </a:r>
-            <a:r>
-              <a:rPr lang="ru-RU" dirty="0">
-                <a:latin typeface="Times New Roman" pitchFamily="18" charset="0"/>
-                <a:cs typeface="Times New Roman" pitchFamily="18" charset="0"/>
-              </a:rPr>
-              <a:t>Если</a:t>
-            </a:r>
-            <a:r>
-              <a:rPr lang="ru-RU" dirty="0" smtClean="0">
-                <a:latin typeface="Times New Roman" pitchFamily="18" charset="0"/>
-                <a:cs typeface="Times New Roman" pitchFamily="18" charset="0"/>
-              </a:rPr>
-              <a:t>  в языке программирования 1С:Предприятие используется для выполнения условных операций. Он позволяет выполнять определенные действия в зависимости от того, выполняется ли заданное условие или нет. Синтаксис оператора </a:t>
-            </a:r>
-            <a:r>
-              <a:rPr lang="ru-RU" dirty="0">
-                <a:latin typeface="Times New Roman" pitchFamily="18" charset="0"/>
-                <a:cs typeface="Times New Roman" pitchFamily="18" charset="0"/>
-              </a:rPr>
-              <a:t>Если</a:t>
-            </a:r>
-            <a:r>
-              <a:rPr lang="ru-RU" dirty="0" smtClean="0">
-                <a:latin typeface="Times New Roman" pitchFamily="18" charset="0"/>
-                <a:cs typeface="Times New Roman" pitchFamily="18" charset="0"/>
-              </a:rPr>
-              <a:t> выглядит следующим образом:</a:t>
-            </a:r>
-            <a:endParaRPr lang="ru-RU" dirty="0">
+              <a:rPr lang="ru-RU" sz="2200" dirty="0" smtClean="0">
+                <a:latin typeface="Times New Roman" pitchFamily="18" charset="0"/>
+                <a:cs typeface="Times New Roman" pitchFamily="18" charset="0"/>
+              </a:rPr>
+              <a:t>По ссылке или по значению? Ключевое слово </a:t>
+            </a:r>
+            <a:r>
+              <a:rPr lang="ru-RU" sz="2200" dirty="0" err="1" smtClean="0">
+                <a:latin typeface="Times New Roman" pitchFamily="18" charset="0"/>
+                <a:cs typeface="Times New Roman" pitchFamily="18" charset="0"/>
+              </a:rPr>
+              <a:t>Знач</a:t>
+            </a:r>
+            <a:r>
+              <a:rPr lang="ru-RU" sz="2200" dirty="0" smtClean="0">
+                <a:latin typeface="Times New Roman" pitchFamily="18" charset="0"/>
+                <a:cs typeface="Times New Roman" pitchFamily="18" charset="0"/>
+              </a:rPr>
+              <a:t> и с чем его едят</a:t>
+            </a:r>
+          </a:p>
+          <a:p>
+            <a:pPr algn="just"/>
+            <a:r>
+              <a:rPr lang="en-US" sz="2200" dirty="0" smtClean="0">
+                <a:latin typeface="Times New Roman" pitchFamily="18" charset="0"/>
+                <a:cs typeface="Times New Roman" pitchFamily="18" charset="0"/>
+                <a:hlinkClick r:id="rId2"/>
+              </a:rPr>
+              <a:t>https://infostart.ru/1c/articles/388527/?ysclid=mn1ynpcvem804062742</a:t>
+            </a:r>
+            <a:endParaRPr lang="en-US" sz="2200" dirty="0" smtClean="0">
               <a:latin typeface="Times New Roman" pitchFamily="18" charset="0"/>
               <a:cs typeface="Times New Roman" pitchFamily="18" charset="0"/>
             </a:endParaRPr>
           </a:p>
-        </p:txBody>
-      </p:sp>
-      <p:pic>
-        <p:nvPicPr>
-          <p:cNvPr id="1026" name="Picture 2"/>
-          <p:cNvPicPr>
-            <a:picLocks noChangeAspect="1" noChangeArrowheads="1"/>
-          </p:cNvPicPr>
-          <p:nvPr/>
-        </p:nvPicPr>
-        <p:blipFill>
-          <a:blip r:embed="rId2"/>
-          <a:srcRect/>
-          <a:stretch>
-            <a:fillRect/>
-          </a:stretch>
-        </p:blipFill>
-        <p:spPr bwMode="auto">
-          <a:xfrm>
-            <a:off x="3428992" y="500042"/>
-            <a:ext cx="5715008" cy="3743325"/>
-          </a:xfrm>
-          <a:prstGeom prst="rect">
-            <a:avLst/>
-          </a:prstGeom>
-          <a:noFill/>
-          <a:ln w="9525">
-            <a:noFill/>
-            <a:miter lim="800000"/>
-            <a:headEnd/>
-            <a:tailEnd/>
-          </a:ln>
-          <a:effectLst/>
-        </p:spPr>
-      </p:pic>
-      <p:pic>
-        <p:nvPicPr>
-          <p:cNvPr id="1027" name="Picture 3"/>
-          <p:cNvPicPr>
-            <a:picLocks noChangeAspect="1" noChangeArrowheads="1"/>
-          </p:cNvPicPr>
-          <p:nvPr/>
-        </p:nvPicPr>
-        <p:blipFill>
-          <a:blip r:embed="rId3"/>
-          <a:srcRect/>
-          <a:stretch>
-            <a:fillRect/>
-          </a:stretch>
-        </p:blipFill>
-        <p:spPr bwMode="auto">
-          <a:xfrm>
-            <a:off x="1714480" y="4286256"/>
-            <a:ext cx="5572164" cy="2571744"/>
-          </a:xfrm>
-          <a:prstGeom prst="rect">
-            <a:avLst/>
-          </a:prstGeom>
-          <a:noFill/>
-          <a:ln w="9525">
-            <a:noFill/>
-            <a:miter lim="800000"/>
-            <a:headEnd/>
-            <a:tailEnd/>
-          </a:ln>
-          <a:effectLst/>
-        </p:spPr>
-      </p:pic>
+          <a:p>
+            <a:pPr algn="just"/>
+            <a:endParaRPr lang="en-US" sz="2200" b="1" dirty="0" smtClean="0">
+              <a:latin typeface="Times New Roman" pitchFamily="18" charset="0"/>
+              <a:cs typeface="Times New Roman" pitchFamily="18" charset="0"/>
+            </a:endParaRPr>
+          </a:p>
+          <a:p>
+            <a:pPr algn="just"/>
+            <a:r>
+              <a:rPr lang="ru-RU" sz="2200" dirty="0" smtClean="0">
+                <a:latin typeface="Times New Roman" pitchFamily="18" charset="0"/>
+                <a:cs typeface="Times New Roman" pitchFamily="18" charset="0"/>
+              </a:rPr>
+              <a:t>Отладчик 1С за 10 минут</a:t>
+            </a:r>
+          </a:p>
+          <a:p>
+            <a:pPr algn="just"/>
+            <a:r>
+              <a:rPr lang="ru-RU" sz="2200" b="1" dirty="0" smtClean="0">
+                <a:latin typeface="Times New Roman" pitchFamily="18" charset="0"/>
+                <a:cs typeface="Times New Roman" pitchFamily="18" charset="0"/>
+              </a:rPr>
+              <a:t> </a:t>
+            </a:r>
+            <a:r>
+              <a:rPr lang="en-US" sz="2200" dirty="0" smtClean="0">
+                <a:latin typeface="Times New Roman" pitchFamily="18" charset="0"/>
+                <a:cs typeface="Times New Roman" pitchFamily="18" charset="0"/>
+                <a:hlinkClick r:id="rId3"/>
+              </a:rPr>
+              <a:t>https://vk.com/video-179327594_456239081</a:t>
+            </a:r>
+            <a:endParaRPr lang="en-US" sz="2200" dirty="0" smtClean="0">
+              <a:latin typeface="Times New Roman" pitchFamily="18" charset="0"/>
+              <a:cs typeface="Times New Roman" pitchFamily="18" charset="0"/>
+            </a:endParaRPr>
+          </a:p>
+          <a:p>
+            <a:pPr algn="just"/>
+            <a:r>
+              <a:rPr lang="en-US" sz="2200" dirty="0" smtClean="0">
+                <a:latin typeface="Times New Roman" pitchFamily="18" charset="0"/>
+                <a:cs typeface="Times New Roman" pitchFamily="18" charset="0"/>
+                <a:hlinkClick r:id="rId4"/>
+              </a:rPr>
+              <a:t>https://www.koderline.ru/expert/instruktsii/article-rabota-s-otladchikom-instruktsiya-dlya-chaynikov/?ysclid=mn1zpv7cpo601017320</a:t>
+            </a:r>
+            <a:endParaRPr lang="en-US" sz="2200" dirty="0" smtClean="0">
+              <a:latin typeface="Times New Roman" pitchFamily="18" charset="0"/>
+              <a:cs typeface="Times New Roman" pitchFamily="18" charset="0"/>
+            </a:endParaRPr>
+          </a:p>
+          <a:p>
+            <a:pPr algn="just"/>
+            <a:endParaRPr lang="en-US" sz="2200" dirty="0" smtClean="0">
+              <a:latin typeface="Times New Roman" pitchFamily="18" charset="0"/>
+              <a:cs typeface="Times New Roman" pitchFamily="18" charset="0"/>
+            </a:endParaRPr>
+          </a:p>
+          <a:p>
+            <a:pPr algn="just"/>
+            <a:r>
+              <a:rPr lang="ru-RU" sz="2200" dirty="0" smtClean="0">
+                <a:latin typeface="Times New Roman" pitchFamily="18" charset="0"/>
+                <a:cs typeface="Times New Roman" pitchFamily="18" charset="0"/>
+              </a:rPr>
+              <a:t>Генератор случайных значений в 1С</a:t>
+            </a:r>
+            <a:endParaRPr lang="en-US" sz="2200" dirty="0" smtClean="0">
+              <a:latin typeface="Times New Roman" pitchFamily="18" charset="0"/>
+              <a:cs typeface="Times New Roman" pitchFamily="18" charset="0"/>
+            </a:endParaRPr>
+          </a:p>
+          <a:p>
+            <a:pPr algn="just"/>
+            <a:r>
+              <a:rPr lang="ru-RU" sz="2200" dirty="0" smtClean="0">
+                <a:latin typeface="Times New Roman" pitchFamily="18" charset="0"/>
+                <a:cs typeface="Times New Roman" pitchFamily="18" charset="0"/>
+                <a:hlinkClick r:id="rId5"/>
+              </a:rPr>
+              <a:t>https://www.koderline.ru/expert/instruktsii/article-generator-sluchaynykh-znacheniy-v-resheniyakh-1s/?</a:t>
+            </a:r>
+            <a:r>
+              <a:rPr lang="ru-RU" sz="2200" dirty="0" smtClean="0">
+                <a:latin typeface="Times New Roman" pitchFamily="18" charset="0"/>
+                <a:cs typeface="Times New Roman" pitchFamily="18" charset="0"/>
+                <a:hlinkClick r:id="rId5"/>
+              </a:rPr>
+              <a:t>ysclid=mn3hiidxg0643888530</a:t>
+            </a:r>
+            <a:endParaRPr lang="en-US" sz="2200" dirty="0" smtClean="0">
+              <a:latin typeface="Times New Roman" pitchFamily="18" charset="0"/>
+              <a:cs typeface="Times New Roman" pitchFamily="18" charset="0"/>
+            </a:endParaRPr>
+          </a:p>
+          <a:p>
+            <a:pPr algn="just"/>
+            <a:endParaRPr lang="en-US" sz="2200" dirty="0" smtClean="0">
+              <a:latin typeface="Times New Roman" pitchFamily="18" charset="0"/>
+              <a:cs typeface="Times New Roman" pitchFamily="18" charset="0"/>
+            </a:endParaRPr>
+          </a:p>
+          <a:p>
+            <a:pPr algn="just"/>
+            <a:r>
+              <a:rPr lang="ru-RU" sz="2200" dirty="0" smtClean="0">
+                <a:latin typeface="Times New Roman" pitchFamily="18" charset="0"/>
+                <a:cs typeface="Times New Roman" pitchFamily="18" charset="0"/>
+              </a:rPr>
+              <a:t>Диалоги с пользователем</a:t>
+            </a:r>
+          </a:p>
+          <a:p>
+            <a:pPr algn="just"/>
+            <a:r>
+              <a:rPr lang="en-US" sz="2200" dirty="0" smtClean="0">
+                <a:latin typeface="Times New Roman" pitchFamily="18" charset="0"/>
+                <a:cs typeface="Times New Roman" pitchFamily="18" charset="0"/>
+                <a:hlinkClick r:id="rId6"/>
+              </a:rPr>
+              <a:t>https://</a:t>
+            </a:r>
+            <a:r>
+              <a:rPr lang="en-US" sz="2200" dirty="0" smtClean="0">
+                <a:latin typeface="Times New Roman" pitchFamily="18" charset="0"/>
+                <a:cs typeface="Times New Roman" pitchFamily="18" charset="0"/>
+                <a:hlinkClick r:id="rId6"/>
+              </a:rPr>
+              <a:t>helpme1s.ru/vnutrennij-yazyk-programmirovaniya-1s-8-3-dlya-nachinayushhix-programmistov-urok-21-ispolzovanie-dialogov?ysclid=mn3htqivp1218864741</a:t>
+            </a:r>
+            <a:endParaRPr lang="ru-RU" sz="2200" dirty="0" smtClean="0">
+              <a:latin typeface="Times New Roman" pitchFamily="18" charset="0"/>
+              <a:cs typeface="Times New Roman" pitchFamily="18" charset="0"/>
+            </a:endParaRPr>
+          </a:p>
+        </p:txBody>
+      </p:sp>
     </p:spTree>
   </p:cSld>
   <p:clrMapOvr>
@@ -3287,14 +4516,42 @@
       </p:grpSpPr>
       <p:sp>
         <p:nvSpPr>
-          <p:cNvPr id="2" name="Прямоугольник 1"/>
+          <p:cNvPr id="2" name="Заголовок 1"/>
+          <p:cNvSpPr>
+            <a:spLocks noGrp="1"/>
+          </p:cNvSpPr>
+          <p:nvPr>
+            <p:ph type="title"/>
+          </p:nvPr>
+        </p:nvSpPr>
+        <p:spPr>
+          <a:xfrm>
+            <a:off x="457200" y="-357214"/>
+            <a:ext cx="8229600" cy="1143000"/>
+          </a:xfrm>
+        </p:spPr>
+        <p:txBody>
+          <a:bodyPr/>
+          <a:lstStyle/>
+          <a:p>
+            <a:r>
+              <a:rPr lang="ru-RU" dirty="0" smtClean="0"/>
+              <a:t>ЕСЛИ</a:t>
+            </a:r>
+            <a:endParaRPr lang="ru-RU" dirty="0"/>
+          </a:p>
+        </p:txBody>
+      </p:sp>
+      <p:sp>
+        <p:nvSpPr>
+          <p:cNvPr id="3" name="Прямоугольник 2"/>
           <p:cNvSpPr/>
           <p:nvPr/>
         </p:nvSpPr>
         <p:spPr>
           <a:xfrm>
-            <a:off x="0" y="1643050"/>
-            <a:ext cx="4429124" cy="3416320"/>
+            <a:off x="0" y="857232"/>
+            <a:ext cx="3357554" cy="3139321"/>
           </a:xfrm>
           <a:prstGeom prst="rect">
             <a:avLst/>
@@ -3308,50 +4565,41 @@
           <a:p>
             <a:pPr algn="just"/>
             <a:r>
-              <a:rPr lang="ru-RU" sz="2400" dirty="0" smtClean="0">
-                <a:latin typeface="Times New Roman" pitchFamily="18" charset="0"/>
-                <a:cs typeface="Times New Roman" pitchFamily="18" charset="0"/>
-              </a:rPr>
-              <a:t>Создайте внешнюю обработку, которая просит пользователя ввести число А и:</a:t>
-            </a:r>
-          </a:p>
-          <a:p>
-            <a:pPr algn="just"/>
-            <a:r>
-              <a:rPr lang="ru-RU" sz="2400" dirty="0" smtClean="0">
-                <a:latin typeface="Times New Roman" pitchFamily="18" charset="0"/>
-                <a:cs typeface="Times New Roman" pitchFamily="18" charset="0"/>
-              </a:rPr>
-              <a:t>Если число больше 5, сообщить разницу между числом и 5;</a:t>
-            </a:r>
-          </a:p>
-          <a:p>
-            <a:pPr algn="just"/>
-            <a:r>
-              <a:rPr lang="ru-RU" sz="2400" dirty="0" smtClean="0">
-                <a:latin typeface="Times New Roman" pitchFamily="18" charset="0"/>
-                <a:cs typeface="Times New Roman" pitchFamily="18" charset="0"/>
-              </a:rPr>
-              <a:t>Если число меньше 5, сообщить разницу между </a:t>
-            </a:r>
-            <a:r>
-              <a:rPr lang="ru-RU" sz="2400" dirty="0" smtClean="0">
-                <a:latin typeface="Times New Roman" pitchFamily="18" charset="0"/>
-                <a:cs typeface="Times New Roman" pitchFamily="18" charset="0"/>
-              </a:rPr>
-              <a:t>5 и этим числом;</a:t>
-            </a:r>
-          </a:p>
-          <a:p>
-            <a:pPr algn="just"/>
-            <a:r>
-              <a:rPr lang="ru-RU" sz="2400" dirty="0" smtClean="0">
-                <a:latin typeface="Times New Roman" pitchFamily="18" charset="0"/>
-                <a:cs typeface="Times New Roman" pitchFamily="18" charset="0"/>
-              </a:rPr>
-              <a:t>Иначе сообщить А=5</a:t>
-            </a:r>
-            <a:endParaRPr lang="ru-RU" sz="2400" dirty="0">
+              <a:rPr lang="ru-RU" dirty="0" smtClean="0">
+                <a:latin typeface="Times New Roman" pitchFamily="18" charset="0"/>
+                <a:cs typeface="Times New Roman" pitchFamily="18" charset="0"/>
+              </a:rPr>
+              <a:t>Оператор </a:t>
+            </a:r>
+            <a:r>
+              <a:rPr lang="ru-RU" dirty="0">
+                <a:latin typeface="Times New Roman" pitchFamily="18" charset="0"/>
+                <a:cs typeface="Times New Roman" pitchFamily="18" charset="0"/>
+              </a:rPr>
+              <a:t>Если</a:t>
+            </a:r>
+            <a:r>
+              <a:rPr lang="ru-RU" dirty="0" smtClean="0">
+                <a:latin typeface="Times New Roman" pitchFamily="18" charset="0"/>
+                <a:cs typeface="Times New Roman" pitchFamily="18" charset="0"/>
+              </a:rPr>
+              <a:t>  в языке программирования 1С:Предприятие используется для выполнения условных операций. Он позволяет выполнять определенные действия в зависимости от того, выполняется ли заданное условие или нет. Синтаксис оператора </a:t>
+            </a:r>
+            <a:r>
+              <a:rPr lang="ru-RU" dirty="0">
+                <a:latin typeface="Times New Roman" pitchFamily="18" charset="0"/>
+                <a:cs typeface="Times New Roman" pitchFamily="18" charset="0"/>
+              </a:rPr>
+              <a:t>Если</a:t>
+            </a:r>
+            <a:r>
+              <a:rPr lang="ru-RU" dirty="0" smtClean="0">
+                <a:latin typeface="Times New Roman" pitchFamily="18" charset="0"/>
+                <a:cs typeface="Times New Roman" pitchFamily="18" charset="0"/>
+              </a:rPr>
+              <a:t> выглядит следующим образом:</a:t>
+            </a:r>
+            <a:endParaRPr lang="ru-RU" dirty="0">
               <a:latin typeface="Times New Roman" pitchFamily="18" charset="0"/>
               <a:cs typeface="Times New Roman" pitchFamily="18" charset="0"/>
             </a:endParaRPr>
@@ -3360,7 +4608,7 @@
       </p:sp>
       <p:pic>
         <p:nvPicPr>
-          <p:cNvPr id="2050" name="Picture 2"/>
+          <p:cNvPr id="1026" name="Picture 2"/>
           <p:cNvPicPr>
             <a:picLocks noChangeAspect="1" noChangeArrowheads="1"/>
           </p:cNvPicPr>
@@ -3375,8 +4623,8 @@
         </p:blipFill>
         <p:spPr bwMode="auto">
           <a:xfrm>
-            <a:off x="4485935" y="428604"/>
-            <a:ext cx="4658065" cy="1143008"/>
+            <a:off x="3428992" y="500042"/>
+            <a:ext cx="5715008" cy="3743325"/>
           </a:xfrm>
           <a:prstGeom prst="rect">
             <a:avLst/>
@@ -3393,7 +4641,7 @@
       </p:pic>
       <p:pic>
         <p:nvPicPr>
-          <p:cNvPr id="2051" name="Picture 3"/>
+          <p:cNvPr id="1027" name="Picture 3"/>
           <p:cNvPicPr>
             <a:picLocks noChangeAspect="1" noChangeArrowheads="1"/>
           </p:cNvPicPr>
@@ -3408,8 +4656,8 @@
         </p:blipFill>
         <p:spPr bwMode="auto">
           <a:xfrm>
-            <a:off x="5214942" y="2124075"/>
-            <a:ext cx="3629025" cy="4733925"/>
+            <a:off x="1714480" y="4286256"/>
+            <a:ext cx="5572164" cy="2571744"/>
           </a:xfrm>
           <a:prstGeom prst="rect">
             <a:avLst/>
@@ -3451,6 +4699,163 @@
       </p:grpSpPr>
       <p:sp>
         <p:nvSpPr>
+          <p:cNvPr id="2" name="Прямоугольник 1"/>
+          <p:cNvSpPr/>
+          <p:nvPr/>
+        </p:nvSpPr>
+        <p:spPr>
+          <a:xfrm>
+            <a:off x="0" y="1643050"/>
+            <a:ext cx="4429124" cy="3416320"/>
+          </a:xfrm>
+          <a:prstGeom prst="rect">
+            <a:avLst/>
+          </a:prstGeom>
+        </p:spPr>
+        <p:txBody>
+          <a:bodyPr wrap="square">
+            <a:spAutoFit/>
+          </a:bodyPr>
+          <a:lstStyle/>
+          <a:p>
+            <a:pPr algn="just"/>
+            <a:r>
+              <a:rPr lang="ru-RU" sz="2400" dirty="0" smtClean="0">
+                <a:latin typeface="Times New Roman" pitchFamily="18" charset="0"/>
+                <a:cs typeface="Times New Roman" pitchFamily="18" charset="0"/>
+              </a:rPr>
+              <a:t>Создайте внешнюю обработку, которая просит пользователя ввести число А и:</a:t>
+            </a:r>
+          </a:p>
+          <a:p>
+            <a:pPr algn="just"/>
+            <a:r>
+              <a:rPr lang="ru-RU" sz="2400" dirty="0" smtClean="0">
+                <a:latin typeface="Times New Roman" pitchFamily="18" charset="0"/>
+                <a:cs typeface="Times New Roman" pitchFamily="18" charset="0"/>
+              </a:rPr>
+              <a:t>Если число больше 5, сообщить разницу между числом и 5;</a:t>
+            </a:r>
+          </a:p>
+          <a:p>
+            <a:pPr algn="just"/>
+            <a:r>
+              <a:rPr lang="ru-RU" sz="2400" dirty="0" smtClean="0">
+                <a:latin typeface="Times New Roman" pitchFamily="18" charset="0"/>
+                <a:cs typeface="Times New Roman" pitchFamily="18" charset="0"/>
+              </a:rPr>
+              <a:t>Если число меньше 5, сообщить разницу между 5 и этим числом;</a:t>
+            </a:r>
+          </a:p>
+          <a:p>
+            <a:pPr algn="just"/>
+            <a:r>
+              <a:rPr lang="ru-RU" sz="2400" dirty="0" smtClean="0">
+                <a:latin typeface="Times New Roman" pitchFamily="18" charset="0"/>
+                <a:cs typeface="Times New Roman" pitchFamily="18" charset="0"/>
+              </a:rPr>
+              <a:t>Иначе сообщить А=5</a:t>
+            </a:r>
+            <a:endParaRPr lang="ru-RU" sz="2400" dirty="0">
+              <a:latin typeface="Times New Roman" pitchFamily="18" charset="0"/>
+              <a:cs typeface="Times New Roman" pitchFamily="18" charset="0"/>
+            </a:endParaRPr>
+          </a:p>
+        </p:txBody>
+      </p:sp>
+      <p:pic>
+        <p:nvPicPr>
+          <p:cNvPr id="2050" name="Picture 2"/>
+          <p:cNvPicPr>
+            <a:picLocks noChangeAspect="1" noChangeArrowheads="1"/>
+          </p:cNvPicPr>
+          <p:nvPr/>
+        </p:nvPicPr>
+        <p:blipFill>
+          <a:blip r:embed="rId2"/>
+          <a:srcRect/>
+          <a:stretch>
+            <a:fillRect/>
+          </a:stretch>
+        </p:blipFill>
+        <p:spPr bwMode="auto">
+          <a:xfrm>
+            <a:off x="4485935" y="428604"/>
+            <a:ext cx="4658065" cy="1143008"/>
+          </a:xfrm>
+          <a:prstGeom prst="rect">
+            <a:avLst/>
+          </a:prstGeom>
+          <a:noFill/>
+          <a:ln w="9525">
+            <a:noFill/>
+            <a:miter lim="800000"/>
+            <a:headEnd/>
+            <a:tailEnd/>
+          </a:ln>
+          <a:effectLst/>
+        </p:spPr>
+      </p:pic>
+      <p:pic>
+        <p:nvPicPr>
+          <p:cNvPr id="2051" name="Picture 3"/>
+          <p:cNvPicPr>
+            <a:picLocks noChangeAspect="1" noChangeArrowheads="1"/>
+          </p:cNvPicPr>
+          <p:nvPr/>
+        </p:nvPicPr>
+        <p:blipFill>
+          <a:blip r:embed="rId3"/>
+          <a:srcRect/>
+          <a:stretch>
+            <a:fillRect/>
+          </a:stretch>
+        </p:blipFill>
+        <p:spPr bwMode="auto">
+          <a:xfrm>
+            <a:off x="5214942" y="2124075"/>
+            <a:ext cx="3629025" cy="4733925"/>
+          </a:xfrm>
+          <a:prstGeom prst="rect">
+            <a:avLst/>
+          </a:prstGeom>
+          <a:noFill/>
+          <a:ln w="9525">
+            <a:noFill/>
+            <a:miter lim="800000"/>
+            <a:headEnd/>
+            <a:tailEnd/>
+          </a:ln>
+          <a:effectLst/>
+        </p:spPr>
+      </p:pic>
+    </p:spTree>
+  </p:cSld>
+  <p:clrMapOvr>
+    <a:masterClrMapping/>
+  </p:clrMapOvr>
+</p:sld>
+</file>
+
+<file path=ppt/slides/slide5.xml><?xml version="1.0" encoding="utf-8"?>
+<p:sld xmlns:a="http://schemas.openxmlformats.org/drawingml/2006/main" xmlns:r="http://schemas.openxmlformats.org/officeDocument/2006/relationships" xmlns:p="http://schemas.openxmlformats.org/presentationml/2006/main">
+  <p:cSld>
+    <p:spTree>
+      <p:nvGrpSpPr>
+        <p:cNvPr id="1" name=""/>
+        <p:cNvGrpSpPr/>
+        <p:nvPr/>
+      </p:nvGrpSpPr>
+      <p:grpSpPr>
+        <a:xfrm>
+          <a:off x="0" y="0"/>
+          <a:ext cx="0" cy="0"/>
+          <a:chOff x="0" y="0"/>
+          <a:chExt cx="0" cy="0"/>
+        </a:xfrm>
+      </p:grpSpPr>
+      <p:sp>
+        <p:nvSpPr>
           <p:cNvPr id="2" name="Заголовок 1"/>
           <p:cNvSpPr>
             <a:spLocks noGrp="1"/>
@@ -3613,7 +5018,7 @@
 </p:sld>
 </file>
 
-<file path=ppt/slides/slide5.xml><?xml version="1.0" encoding="utf-8"?>
+<file path=ppt/slides/slide6.xml><?xml version="1.0" encoding="utf-8"?>
 <p:sld xmlns:a="http://schemas.openxmlformats.org/drawingml/2006/main" xmlns:r="http://schemas.openxmlformats.org/officeDocument/2006/relationships" xmlns:p="http://schemas.openxmlformats.org/presentationml/2006/main">
   <p:cSld>
     <p:spTree>
@@ -3825,6 +5230,639 @@
             <a:tailEnd/>
           </a:ln>
           <a:effectLst/>
+        </p:spPr>
+      </p:pic>
+    </p:spTree>
+  </p:cSld>
+  <p:clrMapOvr>
+    <a:masterClrMapping/>
+  </p:clrMapOvr>
+</p:sld>
+</file>
+
+<file path=ppt/slides/slide7.xml><?xml version="1.0" encoding="utf-8"?>
+<p:sld xmlns:a="http://schemas.openxmlformats.org/drawingml/2006/main" xmlns:r="http://schemas.openxmlformats.org/officeDocument/2006/relationships" xmlns:p="http://schemas.openxmlformats.org/presentationml/2006/main">
+  <p:cSld>
+    <p:spTree>
+      <p:nvGrpSpPr>
+        <p:cNvPr id="1" name=""/>
+        <p:cNvGrpSpPr/>
+        <p:nvPr/>
+      </p:nvGrpSpPr>
+      <p:grpSpPr>
+        <a:xfrm>
+          <a:off x="0" y="0"/>
+          <a:ext cx="0" cy="0"/>
+          <a:chOff x="0" y="0"/>
+          <a:chExt cx="0" cy="0"/>
+        </a:xfrm>
+      </p:grpSpPr>
+      <p:pic>
+        <p:nvPicPr>
+          <p:cNvPr id="1026" name="Picture 2"/>
+          <p:cNvPicPr>
+            <a:picLocks noChangeAspect="1" noChangeArrowheads="1"/>
+          </p:cNvPicPr>
+          <p:nvPr/>
+        </p:nvPicPr>
+        <p:blipFill>
+          <a:blip r:embed="rId2"/>
+          <a:srcRect/>
+          <a:stretch>
+            <a:fillRect/>
+          </a:stretch>
+        </p:blipFill>
+        <p:spPr bwMode="auto">
+          <a:xfrm>
+            <a:off x="0" y="642918"/>
+            <a:ext cx="4286248" cy="3267075"/>
+          </a:xfrm>
+          <a:prstGeom prst="rect">
+            <a:avLst/>
+          </a:prstGeom>
+          <a:noFill/>
+          <a:ln w="9525">
+            <a:noFill/>
+            <a:miter lim="800000"/>
+            <a:headEnd/>
+            <a:tailEnd/>
+          </a:ln>
+          <a:effectLst/>
+        </p:spPr>
+      </p:pic>
+      <p:sp>
+        <p:nvSpPr>
+          <p:cNvPr id="3" name="Заголовок 1"/>
+          <p:cNvSpPr txBox="1">
+            <a:spLocks/>
+          </p:cNvSpPr>
+          <p:nvPr/>
+        </p:nvSpPr>
+        <p:spPr>
+          <a:xfrm>
+            <a:off x="428596" y="-214338"/>
+            <a:ext cx="8229600" cy="1143000"/>
+          </a:xfrm>
+          <a:prstGeom prst="rect">
+            <a:avLst/>
+          </a:prstGeom>
+        </p:spPr>
+        <p:txBody>
+          <a:bodyPr/>
+          <a:lstStyle/>
+          <a:p>
+            <a:pPr marL="0" marR="0" lvl="0" indent="0" algn="ctr" defTabSz="914400" rtl="0" eaLnBrk="1" fontAlgn="auto" latinLnBrk="0" hangingPunct="1">
+              <a:lnSpc>
+                <a:spcPct val="100000"/>
+              </a:lnSpc>
+              <a:spcBef>
+                <a:spcPct val="0"/>
+              </a:spcBef>
+              <a:spcAft>
+                <a:spcPts val="0"/>
+              </a:spcAft>
+              <a:buClrTx/>
+              <a:buSzTx/>
+              <a:buFontTx/>
+              <a:buNone/>
+              <a:tabLst/>
+              <a:defRPr/>
+            </a:pPr>
+            <a:r>
+              <a:rPr kumimoji="0" lang="ru-RU" sz="4400" b="0" i="0" u="none" strike="noStrike" kern="1200" cap="none" spc="0" normalizeH="0" baseline="0" noProof="0" dirty="0" smtClean="0">
+                <a:ln>
+                  <a:noFill/>
+                </a:ln>
+                <a:solidFill>
+                  <a:schemeClr val="tx1"/>
+                </a:solidFill>
+                <a:effectLst/>
+                <a:uLnTx/>
+                <a:uFillTx/>
+                <a:latin typeface="+mj-lt"/>
+                <a:ea typeface="+mj-ea"/>
+                <a:cs typeface="+mj-cs"/>
+              </a:rPr>
+              <a:t>Процедуры и функции</a:t>
+            </a:r>
+            <a:endParaRPr kumimoji="0" lang="ru-RU" sz="4400" b="0" i="0" u="none" strike="noStrike" kern="1200" cap="none" spc="0" normalizeH="0" baseline="0" noProof="0" dirty="0">
+              <a:ln>
+                <a:noFill/>
+              </a:ln>
+              <a:solidFill>
+                <a:schemeClr val="tx1"/>
+              </a:solidFill>
+              <a:effectLst/>
+              <a:uLnTx/>
+              <a:uFillTx/>
+              <a:latin typeface="+mj-lt"/>
+              <a:ea typeface="+mj-ea"/>
+              <a:cs typeface="+mj-cs"/>
+            </a:endParaRPr>
+          </a:p>
+        </p:txBody>
+      </p:sp>
+      <p:pic>
+        <p:nvPicPr>
+          <p:cNvPr id="1027" name="Picture 3"/>
+          <p:cNvPicPr>
+            <a:picLocks noChangeAspect="1" noChangeArrowheads="1"/>
+          </p:cNvPicPr>
+          <p:nvPr/>
+        </p:nvPicPr>
+        <p:blipFill>
+          <a:blip r:embed="rId3"/>
+          <a:srcRect/>
+          <a:stretch>
+            <a:fillRect/>
+          </a:stretch>
+        </p:blipFill>
+        <p:spPr bwMode="auto">
+          <a:xfrm>
+            <a:off x="4500562" y="500042"/>
+            <a:ext cx="4643438" cy="3295650"/>
+          </a:xfrm>
+          <a:prstGeom prst="rect">
+            <a:avLst/>
+          </a:prstGeom>
+          <a:noFill/>
+          <a:ln w="9525">
+            <a:noFill/>
+            <a:miter lim="800000"/>
+            <a:headEnd/>
+            <a:tailEnd/>
+          </a:ln>
+          <a:effectLst/>
+        </p:spPr>
+      </p:pic>
+      <p:pic>
+        <p:nvPicPr>
+          <p:cNvPr id="1028" name="Picture 4"/>
+          <p:cNvPicPr>
+            <a:picLocks noChangeAspect="1" noChangeArrowheads="1"/>
+          </p:cNvPicPr>
+          <p:nvPr/>
+        </p:nvPicPr>
+        <p:blipFill>
+          <a:blip r:embed="rId4"/>
+          <a:srcRect/>
+          <a:stretch>
+            <a:fillRect/>
+          </a:stretch>
+        </p:blipFill>
+        <p:spPr bwMode="auto">
+          <a:xfrm>
+            <a:off x="0" y="3895725"/>
+            <a:ext cx="5572125" cy="2962275"/>
+          </a:xfrm>
+          <a:prstGeom prst="rect">
+            <a:avLst/>
+          </a:prstGeom>
+          <a:noFill/>
+          <a:ln w="9525">
+            <a:noFill/>
+            <a:miter lim="800000"/>
+            <a:headEnd/>
+            <a:tailEnd/>
+          </a:ln>
+          <a:effectLst/>
+        </p:spPr>
+      </p:pic>
+      <p:pic>
+        <p:nvPicPr>
+          <p:cNvPr id="1029" name="Picture 5"/>
+          <p:cNvPicPr>
+            <a:picLocks noChangeAspect="1" noChangeArrowheads="1"/>
+          </p:cNvPicPr>
+          <p:nvPr/>
+        </p:nvPicPr>
+        <p:blipFill>
+          <a:blip r:embed="rId5"/>
+          <a:srcRect/>
+          <a:stretch>
+            <a:fillRect/>
+          </a:stretch>
+        </p:blipFill>
+        <p:spPr bwMode="auto">
+          <a:xfrm>
+            <a:off x="6072198" y="3643314"/>
+            <a:ext cx="2324100" cy="1647825"/>
+          </a:xfrm>
+          <a:prstGeom prst="rect">
+            <a:avLst/>
+          </a:prstGeom>
+          <a:noFill/>
+          <a:ln w="9525">
+            <a:noFill/>
+            <a:miter lim="800000"/>
+            <a:headEnd/>
+            <a:tailEnd/>
+          </a:ln>
+          <a:effectLst/>
+        </p:spPr>
+      </p:pic>
+      <p:pic>
+        <p:nvPicPr>
+          <p:cNvPr id="1030" name="Picture 6"/>
+          <p:cNvPicPr>
+            <a:picLocks noChangeAspect="1" noChangeArrowheads="1"/>
+          </p:cNvPicPr>
+          <p:nvPr/>
+        </p:nvPicPr>
+        <p:blipFill>
+          <a:blip r:embed="rId6"/>
+          <a:srcRect/>
+          <a:stretch>
+            <a:fillRect/>
+          </a:stretch>
+        </p:blipFill>
+        <p:spPr bwMode="auto">
+          <a:xfrm>
+            <a:off x="6072198" y="5305425"/>
+            <a:ext cx="2524125" cy="1552575"/>
+          </a:xfrm>
+          <a:prstGeom prst="rect">
+            <a:avLst/>
+          </a:prstGeom>
+          <a:noFill/>
+          <a:ln w="9525">
+            <a:noFill/>
+            <a:miter lim="800000"/>
+            <a:headEnd/>
+            <a:tailEnd/>
+          </a:ln>
+          <a:effectLst/>
+        </p:spPr>
+      </p:pic>
+    </p:spTree>
+  </p:cSld>
+  <p:clrMapOvr>
+    <a:masterClrMapping/>
+  </p:clrMapOvr>
+</p:sld>
+</file>
+
+<file path=ppt/slides/slide8.xml><?xml version="1.0" encoding="utf-8"?>
+<p:sld xmlns:a="http://schemas.openxmlformats.org/drawingml/2006/main" xmlns:r="http://schemas.openxmlformats.org/officeDocument/2006/relationships" xmlns:p="http://schemas.openxmlformats.org/presentationml/2006/main">
+  <p:cSld>
+    <p:spTree>
+      <p:nvGrpSpPr>
+        <p:cNvPr id="1" name=""/>
+        <p:cNvGrpSpPr/>
+        <p:nvPr/>
+      </p:nvGrpSpPr>
+      <p:grpSpPr>
+        <a:xfrm>
+          <a:off x="0" y="0"/>
+          <a:ext cx="0" cy="0"/>
+          <a:chOff x="0" y="0"/>
+          <a:chExt cx="0" cy="0"/>
+        </a:xfrm>
+      </p:grpSpPr>
+      <p:sp>
+        <p:nvSpPr>
+          <p:cNvPr id="2" name="Прямоугольник 1"/>
+          <p:cNvSpPr/>
+          <p:nvPr/>
+        </p:nvSpPr>
+        <p:spPr>
+          <a:xfrm>
+            <a:off x="0" y="0"/>
+            <a:ext cx="9144000" cy="923330"/>
+          </a:xfrm>
+          <a:prstGeom prst="rect">
+            <a:avLst/>
+          </a:prstGeom>
+        </p:spPr>
+        <p:txBody>
+          <a:bodyPr wrap="square">
+            <a:spAutoFit/>
+          </a:bodyPr>
+          <a:lstStyle/>
+          <a:p>
+            <a:pPr algn="just"/>
+            <a:r>
+              <a:rPr lang="ru-RU" b="1" dirty="0" smtClean="0">
+                <a:latin typeface="Times New Roman" pitchFamily="18" charset="0"/>
+                <a:cs typeface="Times New Roman" pitchFamily="18" charset="0"/>
+              </a:rPr>
+              <a:t>Отладка включается:</a:t>
+            </a:r>
+            <a:endParaRPr lang="en-US" b="1" dirty="0" smtClean="0">
+              <a:latin typeface="Times New Roman" pitchFamily="18" charset="0"/>
+              <a:cs typeface="Times New Roman" pitchFamily="18" charset="0"/>
+            </a:endParaRPr>
+          </a:p>
+          <a:p>
+            <a:pPr algn="just"/>
+            <a:r>
+              <a:rPr lang="ru-RU" b="1" dirty="0" smtClean="0">
+                <a:latin typeface="Times New Roman" pitchFamily="18" charset="0"/>
+                <a:cs typeface="Times New Roman" pitchFamily="18" charset="0"/>
+              </a:rPr>
+              <a:t>1. Через меню "Отладка" → "Начать отладку" (F5). Это происходит при запуске конфигурации в режиме "1С:Предприятие" с отладкой.</a:t>
+            </a:r>
+            <a:endParaRPr lang="ru-RU" b="1" dirty="0">
+              <a:latin typeface="Times New Roman" pitchFamily="18" charset="0"/>
+              <a:cs typeface="Times New Roman" pitchFamily="18" charset="0"/>
+            </a:endParaRPr>
+          </a:p>
+        </p:txBody>
+      </p:sp>
+      <p:pic>
+        <p:nvPicPr>
+          <p:cNvPr id="2050" name="Picture 2" descr="https://ucarecdn.stepik.net/be4ba1a7-208c-4a16-8f86-32733d72f791/"/>
+          <p:cNvPicPr>
+            <a:picLocks noChangeAspect="1" noChangeArrowheads="1"/>
+          </p:cNvPicPr>
+          <p:nvPr/>
+        </p:nvPicPr>
+        <p:blipFill>
+          <a:blip r:embed="rId2"/>
+          <a:srcRect/>
+          <a:stretch>
+            <a:fillRect/>
+          </a:stretch>
+        </p:blipFill>
+        <p:spPr bwMode="auto">
+          <a:xfrm>
+            <a:off x="1285852" y="928670"/>
+            <a:ext cx="6610350" cy="1819276"/>
+          </a:xfrm>
+          <a:prstGeom prst="rect">
+            <a:avLst/>
+          </a:prstGeom>
+          <a:noFill/>
+        </p:spPr>
+      </p:pic>
+      <p:sp>
+        <p:nvSpPr>
+          <p:cNvPr id="4" name="Прямоугольник 3"/>
+          <p:cNvSpPr/>
+          <p:nvPr/>
+        </p:nvSpPr>
+        <p:spPr>
+          <a:xfrm>
+            <a:off x="0" y="2828836"/>
+            <a:ext cx="9144000" cy="646331"/>
+          </a:xfrm>
+          <a:prstGeom prst="rect">
+            <a:avLst/>
+          </a:prstGeom>
+        </p:spPr>
+        <p:txBody>
+          <a:bodyPr wrap="square">
+            <a:spAutoFit/>
+          </a:bodyPr>
+          <a:lstStyle/>
+          <a:p>
+            <a:pPr algn="just"/>
+            <a:r>
+              <a:rPr lang="ru-RU" b="1" dirty="0" smtClean="0">
+                <a:latin typeface="Times New Roman" pitchFamily="18" charset="0"/>
+                <a:cs typeface="Times New Roman" pitchFamily="18" charset="0"/>
+              </a:rPr>
+              <a:t>2. Процесс отладки инициируется нажатием кнопки в конфигураторе, но только после корректной настройки рабочего режима.</a:t>
+            </a:r>
+            <a:endParaRPr lang="ru-RU" b="1" dirty="0">
+              <a:latin typeface="Times New Roman" pitchFamily="18" charset="0"/>
+              <a:cs typeface="Times New Roman" pitchFamily="18" charset="0"/>
+            </a:endParaRPr>
+          </a:p>
+        </p:txBody>
+      </p:sp>
+      <p:pic>
+        <p:nvPicPr>
+          <p:cNvPr id="2052" name="Picture 4" descr="https://ucarecdn.stepik.net/f11a30b2-567d-43d3-972d-78990f3b1c27/"/>
+          <p:cNvPicPr>
+            <a:picLocks noChangeAspect="1" noChangeArrowheads="1"/>
+          </p:cNvPicPr>
+          <p:nvPr/>
+        </p:nvPicPr>
+        <p:blipFill>
+          <a:blip r:embed="rId3"/>
+          <a:srcRect/>
+          <a:stretch>
+            <a:fillRect/>
+          </a:stretch>
+        </p:blipFill>
+        <p:spPr bwMode="auto">
+          <a:xfrm>
+            <a:off x="2071670" y="3500438"/>
+            <a:ext cx="5238736" cy="2950236"/>
+          </a:xfrm>
+          <a:prstGeom prst="rect">
+            <a:avLst/>
+          </a:prstGeom>
+          <a:noFill/>
+        </p:spPr>
+      </p:pic>
+    </p:spTree>
+  </p:cSld>
+  <p:clrMapOvr>
+    <a:masterClrMapping/>
+  </p:clrMapOvr>
+</p:sld>
+</file>
+
+<file path=ppt/slides/slide9.xml><?xml version="1.0" encoding="utf-8"?>
+<p:sld xmlns:a="http://schemas.openxmlformats.org/drawingml/2006/main" xmlns:r="http://schemas.openxmlformats.org/officeDocument/2006/relationships" xmlns:p="http://schemas.openxmlformats.org/presentationml/2006/main">
+  <p:cSld>
+    <p:spTree>
+      <p:nvGrpSpPr>
+        <p:cNvPr id="1" name=""/>
+        <p:cNvGrpSpPr/>
+        <p:nvPr/>
+      </p:nvGrpSpPr>
+      <p:grpSpPr>
+        <a:xfrm>
+          <a:off x="0" y="0"/>
+          <a:ext cx="0" cy="0"/>
+          <a:chOff x="0" y="0"/>
+          <a:chExt cx="0" cy="0"/>
+        </a:xfrm>
+      </p:grpSpPr>
+      <p:sp>
+        <p:nvSpPr>
+          <p:cNvPr id="2" name="Прямоугольник 1"/>
+          <p:cNvSpPr/>
+          <p:nvPr/>
+        </p:nvSpPr>
+        <p:spPr>
+          <a:xfrm>
+            <a:off x="0" y="0"/>
+            <a:ext cx="9144000" cy="646331"/>
+          </a:xfrm>
+          <a:prstGeom prst="rect">
+            <a:avLst/>
+          </a:prstGeom>
+        </p:spPr>
+        <p:txBody>
+          <a:bodyPr wrap="square">
+            <a:spAutoFit/>
+          </a:bodyPr>
+          <a:lstStyle/>
+          <a:p>
+            <a:r>
+              <a:rPr lang="ru-RU" b="1" dirty="0" smtClean="0">
+                <a:latin typeface="Times New Roman" pitchFamily="18" charset="0"/>
+                <a:cs typeface="Times New Roman" pitchFamily="18" charset="0"/>
+              </a:rPr>
+              <a:t>Прежде чем начинать отладку программы следует установить точки останова.</a:t>
+            </a:r>
+            <a:r>
+              <a:rPr lang="en-US" b="1" dirty="0" smtClean="0">
+                <a:latin typeface="Times New Roman" pitchFamily="18" charset="0"/>
+                <a:cs typeface="Times New Roman" pitchFamily="18" charset="0"/>
+              </a:rPr>
+              <a:t> </a:t>
+            </a:r>
+            <a:r>
+              <a:rPr lang="ru-RU" b="1" dirty="0" smtClean="0">
+                <a:latin typeface="Times New Roman" pitchFamily="18" charset="0"/>
+                <a:cs typeface="Times New Roman" pitchFamily="18" charset="0"/>
+              </a:rPr>
+              <a:t>Обычно, двойным щелчком мыши в служебной области слева от необходимой строки.</a:t>
+            </a:r>
+            <a:endParaRPr lang="ru-RU" b="1" dirty="0">
+              <a:latin typeface="Times New Roman" pitchFamily="18" charset="0"/>
+              <a:cs typeface="Times New Roman" pitchFamily="18" charset="0"/>
+            </a:endParaRPr>
+          </a:p>
+        </p:txBody>
+      </p:sp>
+      <p:pic>
+        <p:nvPicPr>
+          <p:cNvPr id="21506" name="Picture 2" descr="https://ucarecdn.stepik.net/d5d049a9-04b0-42ed-88e2-5806c9f11863/"/>
+          <p:cNvPicPr>
+            <a:picLocks noChangeAspect="1" noChangeArrowheads="1"/>
+          </p:cNvPicPr>
+          <p:nvPr/>
+        </p:nvPicPr>
+        <p:blipFill>
+          <a:blip r:embed="rId2"/>
+          <a:srcRect/>
+          <a:stretch>
+            <a:fillRect/>
+          </a:stretch>
+        </p:blipFill>
+        <p:spPr bwMode="auto">
+          <a:xfrm>
+            <a:off x="3143240" y="714356"/>
+            <a:ext cx="2537040" cy="1249204"/>
+          </a:xfrm>
+          <a:prstGeom prst="rect">
+            <a:avLst/>
+          </a:prstGeom>
+          <a:noFill/>
+        </p:spPr>
+      </p:pic>
+      <p:sp>
+        <p:nvSpPr>
+          <p:cNvPr id="4" name="Прямоугольник 3"/>
+          <p:cNvSpPr/>
+          <p:nvPr/>
+        </p:nvSpPr>
+        <p:spPr>
+          <a:xfrm>
+            <a:off x="0" y="2143116"/>
+            <a:ext cx="9144000" cy="2031325"/>
+          </a:xfrm>
+          <a:prstGeom prst="rect">
+            <a:avLst/>
+          </a:prstGeom>
+        </p:spPr>
+        <p:txBody>
+          <a:bodyPr wrap="square">
+            <a:spAutoFit/>
+          </a:bodyPr>
+          <a:lstStyle/>
+          <a:p>
+            <a:pPr algn="just"/>
+            <a:r>
+              <a:rPr lang="ru-RU" dirty="0" smtClean="0">
+                <a:latin typeface="Times New Roman" pitchFamily="18" charset="0"/>
+                <a:cs typeface="Times New Roman" pitchFamily="18" charset="0"/>
+              </a:rPr>
+              <a:t> Алгоритм отладки после точки останова</a:t>
+            </a:r>
+          </a:p>
+          <a:p>
+            <a:pPr algn="just"/>
+            <a:r>
+              <a:rPr lang="ru-RU" dirty="0" smtClean="0">
+                <a:latin typeface="Times New Roman" pitchFamily="18" charset="0"/>
+                <a:cs typeface="Times New Roman" pitchFamily="18" charset="0"/>
+              </a:rPr>
+              <a:t>При достижении точки останова у вас есть несколько способов контроля выполнения программы:</a:t>
+            </a:r>
+          </a:p>
+          <a:p>
+            <a:pPr algn="just"/>
+            <a:r>
+              <a:rPr lang="ru-RU" dirty="0" smtClean="0">
+                <a:latin typeface="Times New Roman" pitchFamily="18" charset="0"/>
+                <a:cs typeface="Times New Roman" pitchFamily="18" charset="0"/>
+              </a:rPr>
+              <a:t>    Шаг за шагом — выполнение текущей строки с переходом к следующей.</a:t>
+            </a:r>
+          </a:p>
+          <a:p>
+            <a:pPr algn="just"/>
+            <a:r>
+              <a:rPr lang="ru-RU" dirty="0" smtClean="0">
+                <a:latin typeface="Times New Roman" pitchFamily="18" charset="0"/>
+                <a:cs typeface="Times New Roman" pitchFamily="18" charset="0"/>
+              </a:rPr>
+              <a:t>    Погружение — вход в вызываемую функцию или процедуру для детальной отладки.</a:t>
+            </a:r>
+          </a:p>
+          <a:p>
+            <a:pPr algn="just"/>
+            <a:r>
+              <a:rPr lang="ru-RU" dirty="0" smtClean="0">
+                <a:latin typeface="Times New Roman" pitchFamily="18" charset="0"/>
+                <a:cs typeface="Times New Roman" pitchFamily="18" charset="0"/>
+              </a:rPr>
+              <a:t>    Выход из процедуры — завершение текущей функции с возвратом в точку вызова.</a:t>
+            </a:r>
+          </a:p>
+          <a:p>
+            <a:pPr algn="just"/>
+            <a:r>
+              <a:rPr lang="ru-RU" dirty="0" smtClean="0">
+                <a:latin typeface="Times New Roman" pitchFamily="18" charset="0"/>
+                <a:cs typeface="Times New Roman" pitchFamily="18" charset="0"/>
+              </a:rPr>
+              <a:t>    Бег до курсора — выполнение кода до строки, на которой установлен курсор.</a:t>
+            </a:r>
+          </a:p>
+        </p:txBody>
+      </p:sp>
+      <p:pic>
+        <p:nvPicPr>
+          <p:cNvPr id="21508" name="Picture 4" descr="https://ucarecdn.stepik.net/e7702195-75f8-40ce-8ea1-9280c791e37a/"/>
+          <p:cNvPicPr>
+            <a:picLocks noChangeAspect="1" noChangeArrowheads="1"/>
+          </p:cNvPicPr>
+          <p:nvPr/>
+        </p:nvPicPr>
+        <p:blipFill>
+          <a:blip r:embed="rId3"/>
+          <a:srcRect/>
+          <a:stretch>
+            <a:fillRect/>
+          </a:stretch>
+        </p:blipFill>
+        <p:spPr bwMode="auto">
+          <a:xfrm>
+            <a:off x="1785918" y="4214818"/>
+            <a:ext cx="5480608" cy="1704906"/>
+          </a:xfrm>
+          <a:prstGeom prst="rect">
+            <a:avLst/>
+          </a:prstGeom>
+          <a:noFill/>
         </p:spPr>
       </p:pic>
     </p:spTree>
